--- a/documentation/presentations/SPOT presentation 04.pptx
+++ b/documentation/presentations/SPOT presentation 04.pptx
@@ -5,12 +5,13 @@
     <p:sldMasterId id="2147483648" r:id="rId1"/>
   </p:sldMasterIdLst>
   <p:notesMasterIdLst>
-    <p:notesMasterId r:id="rId5"/>
+    <p:notesMasterId r:id="rId6"/>
   </p:notesMasterIdLst>
   <p:sldIdLst>
     <p:sldId id="256" r:id="rId2"/>
     <p:sldId id="257" r:id="rId3"/>
-    <p:sldId id="260" r:id="rId4"/>
+    <p:sldId id="261" r:id="rId4"/>
+    <p:sldId id="260" r:id="rId5"/>
   </p:sldIdLst>
   <p:sldSz cx="12192000" cy="6858000"/>
   <p:notesSz cx="6858000" cy="9144000"/>
@@ -9279,6 +9280,188 @@
           <p:cNvPr id="2" name="Title 1">
             <a:extLst>
               <a:ext uri="{FF2B5EF4-FFF2-40B4-BE49-F238E27FC236}">
+                <a16:creationId xmlns:a16="http://schemas.microsoft.com/office/drawing/2014/main" id="{DEF267D6-2E50-9C27-60E9-67AD400B5064}"/>
+              </a:ext>
+            </a:extLst>
+          </p:cNvPr>
+          <p:cNvSpPr>
+            <a:spLocks noGrp="1"/>
+          </p:cNvSpPr>
+          <p:nvPr>
+            <p:ph type="title"/>
+          </p:nvPr>
+        </p:nvSpPr>
+        <p:spPr/>
+        <p:txBody>
+          <a:bodyPr/>
+          <a:lstStyle/>
+          <a:p>
+            <a:pPr algn="ctr"/>
+            <a:r>
+              <a:rPr lang="en-IN" dirty="0">
+                <a:latin typeface="Times New Roman" panose="02020603050405020304" pitchFamily="18" charset="0"/>
+                <a:cs typeface="Times New Roman" panose="02020603050405020304" pitchFamily="18" charset="0"/>
+              </a:rPr>
+              <a:t>Next Step!</a:t>
+            </a:r>
+          </a:p>
+        </p:txBody>
+      </p:sp>
+      <p:sp>
+        <p:nvSpPr>
+          <p:cNvPr id="4" name="Date Placeholder 3">
+            <a:extLst>
+              <a:ext uri="{FF2B5EF4-FFF2-40B4-BE49-F238E27FC236}">
+                <a16:creationId xmlns:a16="http://schemas.microsoft.com/office/drawing/2014/main" id="{42B5D580-9028-99B4-E463-C0142B7E3ABC}"/>
+              </a:ext>
+            </a:extLst>
+          </p:cNvPr>
+          <p:cNvSpPr>
+            <a:spLocks noGrp="1"/>
+          </p:cNvSpPr>
+          <p:nvPr>
+            <p:ph type="dt" sz="half" idx="10"/>
+          </p:nvPr>
+        </p:nvSpPr>
+        <p:spPr/>
+        <p:txBody>
+          <a:bodyPr/>
+          <a:lstStyle/>
+          <a:p>
+            <a:r>
+              <a:rPr lang="en-US" dirty="0"/>
+              <a:t>14.07.2025</a:t>
+            </a:r>
+            <a:endParaRPr lang="de-DE" dirty="0"/>
+          </a:p>
+        </p:txBody>
+      </p:sp>
+      <p:sp>
+        <p:nvSpPr>
+          <p:cNvPr id="5" name="Footer Placeholder 4">
+            <a:extLst>
+              <a:ext uri="{FF2B5EF4-FFF2-40B4-BE49-F238E27FC236}">
+                <a16:creationId xmlns:a16="http://schemas.microsoft.com/office/drawing/2014/main" id="{856F1670-9E32-AB37-4942-3274BCC3D0D0}"/>
+              </a:ext>
+            </a:extLst>
+          </p:cNvPr>
+          <p:cNvSpPr>
+            <a:spLocks noGrp="1"/>
+          </p:cNvSpPr>
+          <p:nvPr>
+            <p:ph type="ftr" sz="quarter" idx="11"/>
+          </p:nvPr>
+        </p:nvSpPr>
+        <p:spPr/>
+        <p:txBody>
+          <a:bodyPr/>
+          <a:lstStyle/>
+          <a:p>
+            <a:r>
+              <a:rPr lang="en-IN"/>
+              <a:t>IDT projects | GDSPOT | SoSe 2025</a:t>
+            </a:r>
+            <a:endParaRPr lang="de-DE"/>
+          </a:p>
+        </p:txBody>
+      </p:sp>
+      <p:sp>
+        <p:nvSpPr>
+          <p:cNvPr id="6" name="Slide Number Placeholder 5">
+            <a:extLst>
+              <a:ext uri="{FF2B5EF4-FFF2-40B4-BE49-F238E27FC236}">
+                <a16:creationId xmlns:a16="http://schemas.microsoft.com/office/drawing/2014/main" id="{E0DDE311-F27F-F537-94EA-6E603010ADA5}"/>
+              </a:ext>
+            </a:extLst>
+          </p:cNvPr>
+          <p:cNvSpPr>
+            <a:spLocks noGrp="1"/>
+          </p:cNvSpPr>
+          <p:nvPr>
+            <p:ph type="sldNum" sz="quarter" idx="12"/>
+          </p:nvPr>
+        </p:nvSpPr>
+        <p:spPr/>
+        <p:txBody>
+          <a:bodyPr/>
+          <a:lstStyle/>
+          <a:p>
+            <a:fld id="{516988D0-1470-4690-BDE1-E3A50181EF78}" type="slidenum">
+              <a:rPr lang="de-DE" smtClean="0"/>
+              <a:t>3</a:t>
+            </a:fld>
+            <a:endParaRPr lang="de-DE"/>
+          </a:p>
+        </p:txBody>
+      </p:sp>
+      <p:sp>
+        <p:nvSpPr>
+          <p:cNvPr id="12" name="Content Placeholder 11">
+            <a:extLst>
+              <a:ext uri="{FF2B5EF4-FFF2-40B4-BE49-F238E27FC236}">
+                <a16:creationId xmlns:a16="http://schemas.microsoft.com/office/drawing/2014/main" id="{FE5FA65A-6FD7-A95D-F217-584EFB98426D}"/>
+              </a:ext>
+            </a:extLst>
+          </p:cNvPr>
+          <p:cNvSpPr>
+            <a:spLocks noGrp="1"/>
+          </p:cNvSpPr>
+          <p:nvPr>
+            <p:ph idx="1"/>
+          </p:nvPr>
+        </p:nvSpPr>
+        <p:spPr/>
+        <p:txBody>
+          <a:bodyPr/>
+          <a:lstStyle/>
+          <a:p>
+            <a:r>
+              <a:rPr lang="en-IN" dirty="0"/>
+              <a:t>Combining some features of WASD with the </a:t>
+            </a:r>
+            <a:r>
+              <a:rPr lang="en-IN"/>
+              <a:t>fiducial follow.</a:t>
+            </a:r>
+            <a:endParaRPr lang="en-IN" dirty="0"/>
+          </a:p>
+        </p:txBody>
+      </p:sp>
+    </p:spTree>
+    <p:extLst>
+      <p:ext uri="{BB962C8B-B14F-4D97-AF65-F5344CB8AC3E}">
+        <p14:creationId xmlns:p14="http://schemas.microsoft.com/office/powerpoint/2010/main" val="1579191496"/>
+      </p:ext>
+    </p:extLst>
+  </p:cSld>
+  <p:clrMapOvr>
+    <a:masterClrMapping/>
+  </p:clrMapOvr>
+</p:sld>
+</file>
+
+<file path=ppt/slides/slide4.xml><?xml version="1.0" encoding="utf-8"?>
+<p:sld xmlns:a="http://schemas.openxmlformats.org/drawingml/2006/main" xmlns:r="http://schemas.openxmlformats.org/officeDocument/2006/relationships" xmlns:p="http://schemas.openxmlformats.org/presentationml/2006/main">
+  <p:cSld>
+    <p:spTree>
+      <p:nvGrpSpPr>
+        <p:cNvPr id="1" name=""/>
+        <p:cNvGrpSpPr/>
+        <p:nvPr/>
+      </p:nvGrpSpPr>
+      <p:grpSpPr>
+        <a:xfrm>
+          <a:off x="0" y="0"/>
+          <a:ext cx="0" cy="0"/>
+          <a:chOff x="0" y="0"/>
+          <a:chExt cx="0" cy="0"/>
+        </a:xfrm>
+      </p:grpSpPr>
+      <p:sp>
+        <p:nvSpPr>
+          <p:cNvPr id="2" name="Title 1">
+            <a:extLst>
+              <a:ext uri="{FF2B5EF4-FFF2-40B4-BE49-F238E27FC236}">
                 <a16:creationId xmlns:a16="http://schemas.microsoft.com/office/drawing/2014/main" id="{7AC46FCE-F9C7-6EBA-A389-8EFFE9785899}"/>
               </a:ext>
             </a:extLst>
@@ -9430,7 +9613,7 @@
           <a:p>
             <a:fld id="{516988D0-1470-4690-BDE1-E3A50181EF78}" type="slidenum">
               <a:rPr lang="de-DE" smtClean="0"/>
-              <a:t>3</a:t>
+              <a:t>4</a:t>
             </a:fld>
             <a:endParaRPr lang="de-DE"/>
           </a:p>

--- a/documentation/presentations/SPOT presentation 04.pptx
+++ b/documentation/presentations/SPOT presentation 04.pptx
@@ -9417,7 +9417,15 @@
           <a:p>
             <a:r>
               <a:rPr lang="en-IN" dirty="0"/>
-              <a:t>Combining some features of WASD with the </a:t>
+              <a:t>Combining some features of WASD or </a:t>
+            </a:r>
+            <a:r>
+              <a:rPr lang="en-IN"/>
+              <a:t>Xbox controller code </a:t>
+            </a:r>
+            <a:r>
+              <a:rPr lang="en-IN" dirty="0"/>
+              <a:t>with the </a:t>
             </a:r>
             <a:r>
               <a:rPr lang="en-IN"/>

--- a/documentation/presentations/SPOT presentation 04.pptx
+++ b/documentation/presentations/SPOT presentation 04.pptx
@@ -5,13 +5,15 @@
     <p:sldMasterId id="2147483648" r:id="rId1"/>
   </p:sldMasterIdLst>
   <p:notesMasterIdLst>
-    <p:notesMasterId r:id="rId6"/>
+    <p:notesMasterId r:id="rId8"/>
   </p:notesMasterIdLst>
   <p:sldIdLst>
     <p:sldId id="256" r:id="rId2"/>
-    <p:sldId id="257" r:id="rId3"/>
-    <p:sldId id="261" r:id="rId4"/>
-    <p:sldId id="260" r:id="rId5"/>
+    <p:sldId id="262" r:id="rId3"/>
+    <p:sldId id="257" r:id="rId4"/>
+    <p:sldId id="263" r:id="rId5"/>
+    <p:sldId id="261" r:id="rId6"/>
+    <p:sldId id="260" r:id="rId7"/>
   </p:sldIdLst>
   <p:sldSz cx="12192000" cy="6858000"/>
   <p:notesSz cx="6858000" cy="9144000"/>
@@ -1515,7 +1517,7 @@
         <a:p>
           <a:r>
             <a:rPr lang="en-IN" dirty="0"/>
-            <a:t>Changing the buffer distance and the speed</a:t>
+            <a:t>Changing the distance margin and the speed</a:t>
           </a:r>
         </a:p>
       </dgm:t>
@@ -1542,6 +1544,78 @@
         </a:p>
       </dgm:t>
     </dgm:pt>
+    <dgm:pt modelId="{A26949AC-B825-4647-A5DB-C3E681B4A287}">
+      <dgm:prSet phldrT="[Text]"/>
+      <dgm:spPr/>
+      <dgm:t>
+        <a:bodyPr/>
+        <a:lstStyle/>
+        <a:p>
+          <a:r>
+            <a:rPr lang="en-IN" dirty="0"/>
+            <a:t>Camera capture</a:t>
+          </a:r>
+        </a:p>
+      </dgm:t>
+    </dgm:pt>
+    <dgm:pt modelId="{7BDAABEB-DAFC-4ECB-80B0-B02EECA6D5AE}" type="parTrans" cxnId="{B8B34A92-FD28-4373-A402-55D8DD6F8575}">
+      <dgm:prSet/>
+      <dgm:spPr/>
+      <dgm:t>
+        <a:bodyPr/>
+        <a:lstStyle/>
+        <a:p>
+          <a:endParaRPr lang="en-IN"/>
+        </a:p>
+      </dgm:t>
+    </dgm:pt>
+    <dgm:pt modelId="{001482A4-F52A-429A-8B24-C41791869803}" type="sibTrans" cxnId="{B8B34A92-FD28-4373-A402-55D8DD6F8575}">
+      <dgm:prSet/>
+      <dgm:spPr/>
+      <dgm:t>
+        <a:bodyPr/>
+        <a:lstStyle/>
+        <a:p>
+          <a:endParaRPr lang="en-IN"/>
+        </a:p>
+      </dgm:t>
+    </dgm:pt>
+    <dgm:pt modelId="{39F1AF94-14E0-4B1B-BB7F-3767D5EB82FC}">
+      <dgm:prSet phldrT="[Text]"/>
+      <dgm:spPr/>
+      <dgm:t>
+        <a:bodyPr/>
+        <a:lstStyle/>
+        <a:p>
+          <a:r>
+            <a:rPr lang="en-IN" dirty="0"/>
+            <a:t>The images from all cameras are captured when client gives the command.</a:t>
+          </a:r>
+        </a:p>
+      </dgm:t>
+    </dgm:pt>
+    <dgm:pt modelId="{9109F4AA-5303-4E78-A29F-CB1C39618C5E}" type="parTrans" cxnId="{ACD0E3A0-C895-4EE4-B374-2D6319383E77}">
+      <dgm:prSet/>
+      <dgm:spPr/>
+      <dgm:t>
+        <a:bodyPr/>
+        <a:lstStyle/>
+        <a:p>
+          <a:endParaRPr lang="en-IN"/>
+        </a:p>
+      </dgm:t>
+    </dgm:pt>
+    <dgm:pt modelId="{F184ECE7-83B7-432C-BF1D-9EBF5B4BF630}" type="sibTrans" cxnId="{ACD0E3A0-C895-4EE4-B374-2D6319383E77}">
+      <dgm:prSet/>
+      <dgm:spPr/>
+      <dgm:t>
+        <a:bodyPr/>
+        <a:lstStyle/>
+        <a:p>
+          <a:endParaRPr lang="en-IN"/>
+        </a:p>
+      </dgm:t>
+    </dgm:pt>
     <dgm:pt modelId="{2EBE3580-ADA9-4E8C-B2D4-803F5099181D}" type="pres">
       <dgm:prSet presAssocID="{9A3670DD-FBDF-4E40-A161-16E795E18CEA}" presName="arrowDiagram" presStyleCnt="0">
         <dgm:presLayoutVars>
@@ -1556,52 +1630,64 @@
       <dgm:prSet presAssocID="{9A3670DD-FBDF-4E40-A161-16E795E18CEA}" presName="arrow" presStyleLbl="bgShp" presStyleIdx="0" presStyleCnt="1"/>
       <dgm:spPr/>
     </dgm:pt>
-    <dgm:pt modelId="{8B1B4F1D-2D47-424E-A584-851759644F8E}" type="pres">
-      <dgm:prSet presAssocID="{9A3670DD-FBDF-4E40-A161-16E795E18CEA}" presName="arrowDiagram4" presStyleCnt="0"/>
+    <dgm:pt modelId="{A80D6553-DE0D-49D8-964E-CD9C8615925B}" type="pres">
+      <dgm:prSet presAssocID="{9A3670DD-FBDF-4E40-A161-16E795E18CEA}" presName="arrowDiagram5" presStyleCnt="0"/>
       <dgm:spPr/>
     </dgm:pt>
-    <dgm:pt modelId="{FA3660C6-BA28-495D-B404-F49E2326BCDB}" type="pres">
-      <dgm:prSet presAssocID="{64AC9532-ECE8-4364-87E8-8271600B14C3}" presName="bullet4a" presStyleLbl="node1" presStyleIdx="0" presStyleCnt="4"/>
+    <dgm:pt modelId="{95138DB0-D67C-4023-80CE-16CB65D35AFC}" type="pres">
+      <dgm:prSet presAssocID="{64AC9532-ECE8-4364-87E8-8271600B14C3}" presName="bullet5a" presStyleLbl="node1" presStyleIdx="0" presStyleCnt="5"/>
       <dgm:spPr/>
     </dgm:pt>
-    <dgm:pt modelId="{6FC9AD64-090B-4F83-81B7-3E76765E1E8F}" type="pres">
-      <dgm:prSet presAssocID="{64AC9532-ECE8-4364-87E8-8271600B14C3}" presName="textBox4a" presStyleLbl="revTx" presStyleIdx="0" presStyleCnt="4">
+    <dgm:pt modelId="{00360BD5-3E9A-4727-B999-F2F1F95368E2}" type="pres">
+      <dgm:prSet presAssocID="{64AC9532-ECE8-4364-87E8-8271600B14C3}" presName="textBox5a" presStyleLbl="revTx" presStyleIdx="0" presStyleCnt="5">
         <dgm:presLayoutVars>
           <dgm:bulletEnabled val="1"/>
         </dgm:presLayoutVars>
       </dgm:prSet>
       <dgm:spPr/>
     </dgm:pt>
-    <dgm:pt modelId="{6E9332C1-6011-44BB-8DB2-ECD30D9D74CF}" type="pres">
-      <dgm:prSet presAssocID="{ADC82244-85B1-4C69-BCF2-1BBD87D2B17B}" presName="bullet4b" presStyleLbl="node1" presStyleIdx="1" presStyleCnt="4"/>
+    <dgm:pt modelId="{103FE9E7-938F-4C91-8DF0-40749CDC25AD}" type="pres">
+      <dgm:prSet presAssocID="{ADC82244-85B1-4C69-BCF2-1BBD87D2B17B}" presName="bullet5b" presStyleLbl="node1" presStyleIdx="1" presStyleCnt="5"/>
       <dgm:spPr/>
     </dgm:pt>
-    <dgm:pt modelId="{6686508F-0ACF-4DD3-AF7B-159149581D5A}" type="pres">
-      <dgm:prSet presAssocID="{ADC82244-85B1-4C69-BCF2-1BBD87D2B17B}" presName="textBox4b" presStyleLbl="revTx" presStyleIdx="1" presStyleCnt="4">
+    <dgm:pt modelId="{8A7EE3DD-C1CB-4105-BE37-C41F1287079C}" type="pres">
+      <dgm:prSet presAssocID="{ADC82244-85B1-4C69-BCF2-1BBD87D2B17B}" presName="textBox5b" presStyleLbl="revTx" presStyleIdx="1" presStyleCnt="5">
         <dgm:presLayoutVars>
           <dgm:bulletEnabled val="1"/>
         </dgm:presLayoutVars>
       </dgm:prSet>
       <dgm:spPr/>
     </dgm:pt>
-    <dgm:pt modelId="{6CF6C1E1-9BA3-43E5-A577-ECC1534D5C24}" type="pres">
-      <dgm:prSet presAssocID="{2B5B277A-5114-4F5C-8BA9-50146BAA0406}" presName="bullet4c" presStyleLbl="node1" presStyleIdx="2" presStyleCnt="4"/>
+    <dgm:pt modelId="{8466DCC2-7B2C-4CDE-8043-43E6480C76F0}" type="pres">
+      <dgm:prSet presAssocID="{2B5B277A-5114-4F5C-8BA9-50146BAA0406}" presName="bullet5c" presStyleLbl="node1" presStyleIdx="2" presStyleCnt="5"/>
       <dgm:spPr/>
     </dgm:pt>
-    <dgm:pt modelId="{706B7F3D-ED1C-4A92-8429-8EA7DD0F5A54}" type="pres">
-      <dgm:prSet presAssocID="{2B5B277A-5114-4F5C-8BA9-50146BAA0406}" presName="textBox4c" presStyleLbl="revTx" presStyleIdx="2" presStyleCnt="4">
+    <dgm:pt modelId="{6D432C6B-E212-4964-A36A-0E1AB8B1A039}" type="pres">
+      <dgm:prSet presAssocID="{2B5B277A-5114-4F5C-8BA9-50146BAA0406}" presName="textBox5c" presStyleLbl="revTx" presStyleIdx="2" presStyleCnt="5">
         <dgm:presLayoutVars>
           <dgm:bulletEnabled val="1"/>
         </dgm:presLayoutVars>
       </dgm:prSet>
       <dgm:spPr/>
     </dgm:pt>
-    <dgm:pt modelId="{4596CD84-BB36-443E-BE91-5F042A626D2B}" type="pres">
-      <dgm:prSet presAssocID="{D13D57E4-5698-4510-B284-E64C56CD8831}" presName="bullet4d" presStyleLbl="node1" presStyleIdx="3" presStyleCnt="4"/>
+    <dgm:pt modelId="{3C393ECE-37C3-41BD-91A5-C7CC4EFF730A}" type="pres">
+      <dgm:prSet presAssocID="{D13D57E4-5698-4510-B284-E64C56CD8831}" presName="bullet5d" presStyleLbl="node1" presStyleIdx="3" presStyleCnt="5"/>
       <dgm:spPr/>
     </dgm:pt>
-    <dgm:pt modelId="{349F1428-BF2E-4EEB-883F-915A3C367AB8}" type="pres">
-      <dgm:prSet presAssocID="{D13D57E4-5698-4510-B284-E64C56CD8831}" presName="textBox4d" presStyleLbl="revTx" presStyleIdx="3" presStyleCnt="4">
+    <dgm:pt modelId="{EAB58CAE-F16E-4FD4-A22D-C0A28B041634}" type="pres">
+      <dgm:prSet presAssocID="{D13D57E4-5698-4510-B284-E64C56CD8831}" presName="textBox5d" presStyleLbl="revTx" presStyleIdx="3" presStyleCnt="5">
+        <dgm:presLayoutVars>
+          <dgm:bulletEnabled val="1"/>
+        </dgm:presLayoutVars>
+      </dgm:prSet>
+      <dgm:spPr/>
+    </dgm:pt>
+    <dgm:pt modelId="{D2CFB6A4-B995-4E7F-BF14-94BCD09CEEBE}" type="pres">
+      <dgm:prSet presAssocID="{A26949AC-B825-4647-A5DB-C3E681B4A287}" presName="bullet5e" presStyleLbl="node1" presStyleIdx="4" presStyleCnt="5"/>
+      <dgm:spPr/>
+    </dgm:pt>
+    <dgm:pt modelId="{06C988F4-6B20-4C25-96A1-F3D74561AB2C}" type="pres">
+      <dgm:prSet presAssocID="{A26949AC-B825-4647-A5DB-C3E681B4A287}" presName="textBox5e" presStyleLbl="revTx" presStyleIdx="4" presStyleCnt="5">
         <dgm:presLayoutVars>
           <dgm:bulletEnabled val="1"/>
         </dgm:presLayoutVars>
@@ -1610,51 +1696,57 @@
     </dgm:pt>
   </dgm:ptLst>
   <dgm:cxnLst>
-    <dgm:cxn modelId="{5B810611-F28C-4A53-9C05-F6C3EC6DBAAC}" type="presOf" srcId="{64AC9532-ECE8-4364-87E8-8271600B14C3}" destId="{6FC9AD64-090B-4F83-81B7-3E76765E1E8F}" srcOrd="0" destOrd="0" presId="urn:microsoft.com/office/officeart/2005/8/layout/arrow2"/>
+    <dgm:cxn modelId="{AAD00615-4021-4CAC-A401-6CE2FDB38FC4}" type="presOf" srcId="{ADC82244-85B1-4C69-BCF2-1BBD87D2B17B}" destId="{8A7EE3DD-C1CB-4105-BE37-C41F1287079C}" srcOrd="0" destOrd="0" presId="urn:microsoft.com/office/officeart/2005/8/layout/arrow2"/>
+    <dgm:cxn modelId="{06A95E1D-0829-4FA3-AB16-CD48E55EB2F2}" type="presOf" srcId="{64AC9532-ECE8-4364-87E8-8271600B14C3}" destId="{00360BD5-3E9A-4727-B999-F2F1F95368E2}" srcOrd="0" destOrd="0" presId="urn:microsoft.com/office/officeart/2005/8/layout/arrow2"/>
     <dgm:cxn modelId="{DBAD0F20-980A-4FEA-8637-757D511AF30C}" type="presOf" srcId="{9A3670DD-FBDF-4E40-A161-16E795E18CEA}" destId="{2EBE3580-ADA9-4E8C-B2D4-803F5099181D}" srcOrd="0" destOrd="0" presId="urn:microsoft.com/office/officeart/2005/8/layout/arrow2"/>
-    <dgm:cxn modelId="{AD12D424-A15C-4B01-97AD-9023D4DF91C6}" type="presOf" srcId="{01A42577-FBE6-462E-BB58-C0AE59B16907}" destId="{706B7F3D-ED1C-4A92-8429-8EA7DD0F5A54}" srcOrd="0" destOrd="4" presId="urn:microsoft.com/office/officeart/2005/8/layout/arrow2"/>
-    <dgm:cxn modelId="{2B1DD52B-5107-4A50-80C1-A213F011961C}" type="presOf" srcId="{61403A83-9BE3-40A2-B42C-973475F99AA1}" destId="{349F1428-BF2E-4EEB-883F-915A3C367AB8}" srcOrd="0" destOrd="1" presId="urn:microsoft.com/office/officeart/2005/8/layout/arrow2"/>
+    <dgm:cxn modelId="{75055626-5808-4E28-B933-007FD1E63488}" type="presOf" srcId="{39F1AF94-14E0-4B1B-BB7F-3767D5EB82FC}" destId="{06C988F4-6B20-4C25-96A1-F3D74561AB2C}" srcOrd="0" destOrd="1" presId="urn:microsoft.com/office/officeart/2005/8/layout/arrow2"/>
+    <dgm:cxn modelId="{8C40B035-553A-4348-AB82-4FA4023895D3}" type="presOf" srcId="{A26949AC-B825-4647-A5DB-C3E681B4A287}" destId="{06C988F4-6B20-4C25-96A1-F3D74561AB2C}" srcOrd="0" destOrd="0" presId="urn:microsoft.com/office/officeart/2005/8/layout/arrow2"/>
     <dgm:cxn modelId="{2E5F303B-54E6-4679-B933-BEE81FCD8623}" srcId="{D13D57E4-5698-4510-B284-E64C56CD8831}" destId="{1A66C9AC-2ACA-45FE-89FC-1B02925D93C1}" srcOrd="2" destOrd="0" parTransId="{8AD03E63-577C-4804-BA6F-6A348107CB26}" sibTransId="{FDA295F0-B18F-4EC3-A57C-702400C3BB23}"/>
-    <dgm:cxn modelId="{B598CD3C-92C5-4497-B51D-4BA6B289469E}" type="presOf" srcId="{2B5B277A-5114-4F5C-8BA9-50146BAA0406}" destId="{706B7F3D-ED1C-4A92-8429-8EA7DD0F5A54}" srcOrd="0" destOrd="0" presId="urn:microsoft.com/office/officeart/2005/8/layout/arrow2"/>
+    <dgm:cxn modelId="{10F5813C-A038-49B5-9A18-0126A80C03F2}" type="presOf" srcId="{FDA06707-964D-4F46-82A2-7CECDF97DFFD}" destId="{6D432C6B-E212-4964-A36A-0E1AB8B1A039}" srcOrd="0" destOrd="3" presId="urn:microsoft.com/office/officeart/2005/8/layout/arrow2"/>
     <dgm:cxn modelId="{DCC4E53D-E5D8-4C40-A1D4-9D0B1BE18D6F}" srcId="{9A3670DD-FBDF-4E40-A161-16E795E18CEA}" destId="{64AC9532-ECE8-4364-87E8-8271600B14C3}" srcOrd="0" destOrd="0" parTransId="{B5E3F941-1EE2-4DE5-A4D3-D1DB775E2078}" sibTransId="{4D1160E2-0A8E-4EB0-9947-2B819ED554F3}"/>
     <dgm:cxn modelId="{E38D803F-4330-4A92-99A7-BA0FCD52DEB5}" srcId="{64AC9532-ECE8-4364-87E8-8271600B14C3}" destId="{1C94207C-2542-45A0-A36B-73D12272BD94}" srcOrd="1" destOrd="0" parTransId="{1087C0A7-A635-4E79-8EDB-F256F78FD7BC}" sibTransId="{9D0910FE-31ED-4F9C-BEC7-BF616BD362DF}"/>
-    <dgm:cxn modelId="{D403A83F-B792-4313-BE72-7B41186DCD2D}" type="presOf" srcId="{FB1CC76B-679D-400C-AFD5-4298C6D174A5}" destId="{706B7F3D-ED1C-4A92-8429-8EA7DD0F5A54}" srcOrd="0" destOrd="1" presId="urn:microsoft.com/office/officeart/2005/8/layout/arrow2"/>
     <dgm:cxn modelId="{690F8C42-B2A3-47CD-B26C-F9141D150351}" srcId="{ADC82244-85B1-4C69-BCF2-1BBD87D2B17B}" destId="{C73375F5-A73C-4605-89C6-41B0696826F7}" srcOrd="1" destOrd="0" parTransId="{B54E3087-E1B5-4FF6-BC86-41B652FFE700}" sibTransId="{6501A295-B085-45D0-8FF8-E8B3F329D428}"/>
-    <dgm:cxn modelId="{817F3047-A784-482D-863B-4A82DF59733E}" type="presOf" srcId="{1EA01AD1-E448-4E2D-ADA6-53A58C0B38CE}" destId="{6FC9AD64-090B-4F83-81B7-3E76765E1E8F}" srcOrd="0" destOrd="1" presId="urn:microsoft.com/office/officeart/2005/8/layout/arrow2"/>
+    <dgm:cxn modelId="{5F0CF544-014D-4674-8E87-898AEF3BE2C2}" type="presOf" srcId="{1C94207C-2542-45A0-A36B-73D12272BD94}" destId="{00360BD5-3E9A-4727-B999-F2F1F95368E2}" srcOrd="0" destOrd="2" presId="urn:microsoft.com/office/officeart/2005/8/layout/arrow2"/>
+    <dgm:cxn modelId="{FA5D3E48-704C-4393-A009-855B090B0B44}" type="presOf" srcId="{2B5B277A-5114-4F5C-8BA9-50146BAA0406}" destId="{6D432C6B-E212-4964-A36A-0E1AB8B1A039}" srcOrd="0" destOrd="0" presId="urn:microsoft.com/office/officeart/2005/8/layout/arrow2"/>
     <dgm:cxn modelId="{5E885948-A5F8-4376-9CEC-668168FFDA75}" srcId="{2B5B277A-5114-4F5C-8BA9-50146BAA0406}" destId="{01A42577-FBE6-462E-BB58-C0AE59B16907}" srcOrd="3" destOrd="0" parTransId="{79C423E0-1DF9-4BDC-ABBF-F65EDEEBF4B5}" sibTransId="{EF526793-4FE0-4F2B-A77A-4730326789D9}"/>
-    <dgm:cxn modelId="{8C3D206B-1E22-43E2-A7F2-328DD2341884}" type="presOf" srcId="{C73375F5-A73C-4605-89C6-41B0696826F7}" destId="{6686508F-0ACF-4DD3-AF7B-159149581D5A}" srcOrd="0" destOrd="2" presId="urn:microsoft.com/office/officeart/2005/8/layout/arrow2"/>
-    <dgm:cxn modelId="{10E8CC90-6536-434C-AE86-D2625CFEF63A}" type="presOf" srcId="{ADC82244-85B1-4C69-BCF2-1BBD87D2B17B}" destId="{6686508F-0ACF-4DD3-AF7B-159149581D5A}" srcOrd="0" destOrd="0" presId="urn:microsoft.com/office/officeart/2005/8/layout/arrow2"/>
+    <dgm:cxn modelId="{2C19B26E-0A1B-4D53-AF54-EBE434918CDA}" type="presOf" srcId="{C73375F5-A73C-4605-89C6-41B0696826F7}" destId="{8A7EE3DD-C1CB-4105-BE37-C41F1287079C}" srcOrd="0" destOrd="2" presId="urn:microsoft.com/office/officeart/2005/8/layout/arrow2"/>
+    <dgm:cxn modelId="{6A5A7D72-E1EC-4117-8042-887691C53E65}" type="presOf" srcId="{EDEA1632-9C73-4619-BB29-734779DAC2D3}" destId="{8A7EE3DD-C1CB-4105-BE37-C41F1287079C}" srcOrd="0" destOrd="1" presId="urn:microsoft.com/office/officeart/2005/8/layout/arrow2"/>
+    <dgm:cxn modelId="{1E425C57-0ECC-484D-A8F8-DC5CC3CA805D}" type="presOf" srcId="{088147EB-117D-4D7B-A18D-C1F25F44CBD7}" destId="{6D432C6B-E212-4964-A36A-0E1AB8B1A039}" srcOrd="0" destOrd="2" presId="urn:microsoft.com/office/officeart/2005/8/layout/arrow2"/>
+    <dgm:cxn modelId="{F7B72359-EC28-47E1-A6EA-BCB9074DB280}" type="presOf" srcId="{4BF03AEC-16C8-49AE-AAF8-13EDD819CCA3}" destId="{EAB58CAE-F16E-4FD4-A22D-C0A28B041634}" srcOrd="0" destOrd="5" presId="urn:microsoft.com/office/officeart/2005/8/layout/arrow2"/>
+    <dgm:cxn modelId="{B8B34A92-FD28-4373-A402-55D8DD6F8575}" srcId="{9A3670DD-FBDF-4E40-A161-16E795E18CEA}" destId="{A26949AC-B825-4647-A5DB-C3E681B4A287}" srcOrd="4" destOrd="0" parTransId="{7BDAABEB-DAFC-4ECB-80B0-B02EECA6D5AE}" sibTransId="{001482A4-F52A-429A-8B24-C41791869803}"/>
+    <dgm:cxn modelId="{5266499A-4CD8-439F-BB92-590DC3E216CA}" type="presOf" srcId="{1A66C9AC-2ACA-45FE-89FC-1B02925D93C1}" destId="{EAB58CAE-F16E-4FD4-A22D-C0A28B041634}" srcOrd="0" destOrd="3" presId="urn:microsoft.com/office/officeart/2005/8/layout/arrow2"/>
+    <dgm:cxn modelId="{6D953DA0-8B7B-4847-A65F-15387887C035}" type="presOf" srcId="{61403A83-9BE3-40A2-B42C-973475F99AA1}" destId="{EAB58CAE-F16E-4FD4-A22D-C0A28B041634}" srcOrd="0" destOrd="1" presId="urn:microsoft.com/office/officeart/2005/8/layout/arrow2"/>
     <dgm:cxn modelId="{EE71B5A0-D8A2-4785-AD46-A13DCBE97129}" srcId="{2B5B277A-5114-4F5C-8BA9-50146BAA0406}" destId="{FB1CC76B-679D-400C-AFD5-4298C6D174A5}" srcOrd="0" destOrd="0" parTransId="{1B69B3D2-AD7D-4247-A47A-19BFEF3822C4}" sibTransId="{AA36E6A7-47A2-4447-AFDF-6D8396FF3F68}"/>
+    <dgm:cxn modelId="{ACD0E3A0-C895-4EE4-B374-2D6319383E77}" srcId="{A26949AC-B825-4647-A5DB-C3E681B4A287}" destId="{39F1AF94-14E0-4B1B-BB7F-3767D5EB82FC}" srcOrd="0" destOrd="0" parTransId="{9109F4AA-5303-4E78-A29F-CB1C39618C5E}" sibTransId="{F184ECE7-83B7-432C-BF1D-9EBF5B4BF630}"/>
     <dgm:cxn modelId="{F74FECA1-38A5-4DA7-918C-0CBF78E50A19}" srcId="{9A3670DD-FBDF-4E40-A161-16E795E18CEA}" destId="{2B5B277A-5114-4F5C-8BA9-50146BAA0406}" srcOrd="2" destOrd="0" parTransId="{49FC44A4-010A-4854-909C-8BF2E95476B5}" sibTransId="{BB50E682-1644-41B0-8CBB-8D853A2687BC}"/>
-    <dgm:cxn modelId="{BE92C7A2-2FB4-4979-BABA-7A4DB190024A}" type="presOf" srcId="{A78F32E8-3519-46F9-88AB-799BA3CBED02}" destId="{349F1428-BF2E-4EEB-883F-915A3C367AB8}" srcOrd="0" destOrd="2" presId="urn:microsoft.com/office/officeart/2005/8/layout/arrow2"/>
     <dgm:cxn modelId="{3DFBC5A9-E452-4325-AB6E-B26C1533BCC8}" srcId="{9A3670DD-FBDF-4E40-A161-16E795E18CEA}" destId="{ADC82244-85B1-4C69-BCF2-1BBD87D2B17B}" srcOrd="1" destOrd="0" parTransId="{A93B40C5-5398-46AE-974C-106DD74E0790}" sibTransId="{52FEBF9C-DC20-470B-9450-EAE4018BF773}"/>
+    <dgm:cxn modelId="{5483CBAB-7357-4045-B6B8-C3D4CC17F8B2}" type="presOf" srcId="{2E268C97-BECC-4B6C-BFD4-5B76579D6578}" destId="{EAB58CAE-F16E-4FD4-A22D-C0A28B041634}" srcOrd="0" destOrd="4" presId="urn:microsoft.com/office/officeart/2005/8/layout/arrow2"/>
     <dgm:cxn modelId="{0F8387B2-CAC0-40DD-874D-DA00C360DDAA}" srcId="{2B5B277A-5114-4F5C-8BA9-50146BAA0406}" destId="{088147EB-117D-4D7B-A18D-C1F25F44CBD7}" srcOrd="1" destOrd="0" parTransId="{BAEB63A0-9C8D-4656-8692-DAAF630C2EBD}" sibTransId="{CB0C3182-0DF2-4898-B0D1-1383FA21B6AF}"/>
+    <dgm:cxn modelId="{794798B4-BC36-4174-BC07-2491A818214D}" type="presOf" srcId="{1EA01AD1-E448-4E2D-ADA6-53A58C0B38CE}" destId="{00360BD5-3E9A-4727-B999-F2F1F95368E2}" srcOrd="0" destOrd="1" presId="urn:microsoft.com/office/officeart/2005/8/layout/arrow2"/>
     <dgm:cxn modelId="{27743BB9-6B8B-4586-8CDE-297F7A33D7D1}" srcId="{9A3670DD-FBDF-4E40-A161-16E795E18CEA}" destId="{D13D57E4-5698-4510-B284-E64C56CD8831}" srcOrd="3" destOrd="0" parTransId="{B376A468-E8A1-43F6-A133-1339C123BE61}" sibTransId="{A24BA9BB-D86D-4300-B42E-915D839FC005}"/>
-    <dgm:cxn modelId="{C06B4BBA-785B-44D3-BD24-2A690FE275FF}" type="presOf" srcId="{FDA06707-964D-4F46-82A2-7CECDF97DFFD}" destId="{706B7F3D-ED1C-4A92-8429-8EA7DD0F5A54}" srcOrd="0" destOrd="3" presId="urn:microsoft.com/office/officeart/2005/8/layout/arrow2"/>
     <dgm:cxn modelId="{F337AFBB-D1E0-4E7D-9D9A-51738EDAF77F}" srcId="{D13D57E4-5698-4510-B284-E64C56CD8831}" destId="{4BF03AEC-16C8-49AE-AAF8-13EDD819CCA3}" srcOrd="4" destOrd="0" parTransId="{E6CD20B0-9FBD-441A-9347-824BB43460D4}" sibTransId="{29AA24CD-B0B9-4D5F-BCC6-70B98C0A235B}"/>
-    <dgm:cxn modelId="{1A7FF9C6-AD78-4A40-88B1-8ED71B932553}" type="presOf" srcId="{D13D57E4-5698-4510-B284-E64C56CD8831}" destId="{349F1428-BF2E-4EEB-883F-915A3C367AB8}" srcOrd="0" destOrd="0" presId="urn:microsoft.com/office/officeart/2005/8/layout/arrow2"/>
-    <dgm:cxn modelId="{4DDB23CA-EDBF-4E79-BBEA-B91DA47641E6}" type="presOf" srcId="{088147EB-117D-4D7B-A18D-C1F25F44CBD7}" destId="{706B7F3D-ED1C-4A92-8429-8EA7DD0F5A54}" srcOrd="0" destOrd="2" presId="urn:microsoft.com/office/officeart/2005/8/layout/arrow2"/>
-    <dgm:cxn modelId="{C194BAD8-6FD5-482D-BF77-DE6F58E61FFA}" type="presOf" srcId="{2E268C97-BECC-4B6C-BFD4-5B76579D6578}" destId="{349F1428-BF2E-4EEB-883F-915A3C367AB8}" srcOrd="0" destOrd="4" presId="urn:microsoft.com/office/officeart/2005/8/layout/arrow2"/>
-    <dgm:cxn modelId="{C533F5D9-571F-48F6-A238-8843E524FA91}" type="presOf" srcId="{1A66C9AC-2ACA-45FE-89FC-1B02925D93C1}" destId="{349F1428-BF2E-4EEB-883F-915A3C367AB8}" srcOrd="0" destOrd="3" presId="urn:microsoft.com/office/officeart/2005/8/layout/arrow2"/>
-    <dgm:cxn modelId="{417745E0-53A2-400F-8CAF-F0BF693CE991}" type="presOf" srcId="{EDEA1632-9C73-4619-BB29-734779DAC2D3}" destId="{6686508F-0ACF-4DD3-AF7B-159149581D5A}" srcOrd="0" destOrd="1" presId="urn:microsoft.com/office/officeart/2005/8/layout/arrow2"/>
+    <dgm:cxn modelId="{34AEEBD8-CB13-4EFB-87A4-91CD1012E694}" type="presOf" srcId="{A78F32E8-3519-46F9-88AB-799BA3CBED02}" destId="{EAB58CAE-F16E-4FD4-A22D-C0A28B041634}" srcOrd="0" destOrd="2" presId="urn:microsoft.com/office/officeart/2005/8/layout/arrow2"/>
+    <dgm:cxn modelId="{B10735DB-73D2-4B17-BCF9-6EE4AEC353FD}" type="presOf" srcId="{01A42577-FBE6-462E-BB58-C0AE59B16907}" destId="{6D432C6B-E212-4964-A36A-0E1AB8B1A039}" srcOrd="0" destOrd="4" presId="urn:microsoft.com/office/officeart/2005/8/layout/arrow2"/>
     <dgm:cxn modelId="{654415E3-4FC5-4B25-B51F-D37192D90895}" srcId="{D13D57E4-5698-4510-B284-E64C56CD8831}" destId="{61403A83-9BE3-40A2-B42C-973475F99AA1}" srcOrd="0" destOrd="0" parTransId="{1A057D17-C85A-4AC7-AB55-5611CA01D8E6}" sibTransId="{68CB091C-E4BF-46CE-A66B-B56DE315922B}"/>
+    <dgm:cxn modelId="{304056E3-6FB6-4893-B9EF-54ABF089C9F3}" type="presOf" srcId="{FB1CC76B-679D-400C-AFD5-4298C6D174A5}" destId="{6D432C6B-E212-4964-A36A-0E1AB8B1A039}" srcOrd="0" destOrd="1" presId="urn:microsoft.com/office/officeart/2005/8/layout/arrow2"/>
+    <dgm:cxn modelId="{473287E3-F21D-4706-AD7D-56EC1A12C63F}" type="presOf" srcId="{D13D57E4-5698-4510-B284-E64C56CD8831}" destId="{EAB58CAE-F16E-4FD4-A22D-C0A28B041634}" srcOrd="0" destOrd="0" presId="urn:microsoft.com/office/officeart/2005/8/layout/arrow2"/>
     <dgm:cxn modelId="{871B66EA-0F57-4EF1-9BA6-DB7F698E1644}" srcId="{ADC82244-85B1-4C69-BCF2-1BBD87D2B17B}" destId="{EDEA1632-9C73-4619-BB29-734779DAC2D3}" srcOrd="0" destOrd="0" parTransId="{1FB2BEC6-5807-4673-B0A0-2E2E357AC922}" sibTransId="{5AFF6E66-529E-4116-8540-A5686A78295A}"/>
     <dgm:cxn modelId="{6E5450EC-C5D4-4609-AD4A-571FD8EB968C}" srcId="{64AC9532-ECE8-4364-87E8-8271600B14C3}" destId="{1EA01AD1-E448-4E2D-ADA6-53A58C0B38CE}" srcOrd="0" destOrd="0" parTransId="{D004C616-AE35-410F-9230-E4D9FF7605B3}" sibTransId="{2E0C2E45-2465-4C9B-A905-A397E5101E8B}"/>
     <dgm:cxn modelId="{0C80B8EE-9E2B-4913-B584-5CFE86E30C24}" srcId="{D13D57E4-5698-4510-B284-E64C56CD8831}" destId="{2E268C97-BECC-4B6C-BFD4-5B76579D6578}" srcOrd="3" destOrd="0" parTransId="{340E8F73-A9B6-43F7-A90B-E00004876BF4}" sibTransId="{E3BCD696-47B0-4D01-8E83-09E533982714}"/>
-    <dgm:cxn modelId="{E9397EF6-6FCB-414A-AA8E-B3026C5C34C6}" type="presOf" srcId="{1C94207C-2542-45A0-A36B-73D12272BD94}" destId="{6FC9AD64-090B-4F83-81B7-3E76765E1E8F}" srcOrd="0" destOrd="2" presId="urn:microsoft.com/office/officeart/2005/8/layout/arrow2"/>
     <dgm:cxn modelId="{EAE182F6-C337-4144-BE46-CD75837FA4FF}" srcId="{D13D57E4-5698-4510-B284-E64C56CD8831}" destId="{A78F32E8-3519-46F9-88AB-799BA3CBED02}" srcOrd="1" destOrd="0" parTransId="{FBF473BA-893D-4CED-97CC-E01179F22F7C}" sibTransId="{783442AB-4702-4B58-B5CB-0EA562B45988}"/>
     <dgm:cxn modelId="{3ADF06F8-55BC-42C9-995A-3CC1106E76F0}" srcId="{2B5B277A-5114-4F5C-8BA9-50146BAA0406}" destId="{FDA06707-964D-4F46-82A2-7CECDF97DFFD}" srcOrd="2" destOrd="0" parTransId="{5B668636-D617-449B-9537-9FE41DD58FAA}" sibTransId="{3FA6A242-9B30-4E5B-A8CB-A5E8C8B1D22D}"/>
-    <dgm:cxn modelId="{ADCC97FF-515B-4BAC-A227-D460758A306B}" type="presOf" srcId="{4BF03AEC-16C8-49AE-AAF8-13EDD819CCA3}" destId="{349F1428-BF2E-4EEB-883F-915A3C367AB8}" srcOrd="0" destOrd="5" presId="urn:microsoft.com/office/officeart/2005/8/layout/arrow2"/>
     <dgm:cxn modelId="{34507A3F-CD8A-4CA4-B6E3-E2A90AE36381}" type="presParOf" srcId="{2EBE3580-ADA9-4E8C-B2D4-803F5099181D}" destId="{0A0DC442-8FA8-43C1-81D4-746E6611382C}" srcOrd="0" destOrd="0" presId="urn:microsoft.com/office/officeart/2005/8/layout/arrow2"/>
-    <dgm:cxn modelId="{5CCEF966-30EE-401F-B68C-432DC4D489EC}" type="presParOf" srcId="{2EBE3580-ADA9-4E8C-B2D4-803F5099181D}" destId="{8B1B4F1D-2D47-424E-A584-851759644F8E}" srcOrd="1" destOrd="0" presId="urn:microsoft.com/office/officeart/2005/8/layout/arrow2"/>
-    <dgm:cxn modelId="{2812D207-962A-409B-9E4D-7C5C5BC8A463}" type="presParOf" srcId="{8B1B4F1D-2D47-424E-A584-851759644F8E}" destId="{FA3660C6-BA28-495D-B404-F49E2326BCDB}" srcOrd="0" destOrd="0" presId="urn:microsoft.com/office/officeart/2005/8/layout/arrow2"/>
-    <dgm:cxn modelId="{0AD9D320-7E08-4547-892B-888A8870A7D1}" type="presParOf" srcId="{8B1B4F1D-2D47-424E-A584-851759644F8E}" destId="{6FC9AD64-090B-4F83-81B7-3E76765E1E8F}" srcOrd="1" destOrd="0" presId="urn:microsoft.com/office/officeart/2005/8/layout/arrow2"/>
-    <dgm:cxn modelId="{256F4C9C-3AF4-4157-980B-88DB7715B7FC}" type="presParOf" srcId="{8B1B4F1D-2D47-424E-A584-851759644F8E}" destId="{6E9332C1-6011-44BB-8DB2-ECD30D9D74CF}" srcOrd="2" destOrd="0" presId="urn:microsoft.com/office/officeart/2005/8/layout/arrow2"/>
-    <dgm:cxn modelId="{2C1D7A17-F7E2-4EB8-B337-99D1D2B49268}" type="presParOf" srcId="{8B1B4F1D-2D47-424E-A584-851759644F8E}" destId="{6686508F-0ACF-4DD3-AF7B-159149581D5A}" srcOrd="3" destOrd="0" presId="urn:microsoft.com/office/officeart/2005/8/layout/arrow2"/>
-    <dgm:cxn modelId="{E368EB7F-BEFA-4F23-92F3-FD1663203C21}" type="presParOf" srcId="{8B1B4F1D-2D47-424E-A584-851759644F8E}" destId="{6CF6C1E1-9BA3-43E5-A577-ECC1534D5C24}" srcOrd="4" destOrd="0" presId="urn:microsoft.com/office/officeart/2005/8/layout/arrow2"/>
-    <dgm:cxn modelId="{563D1D40-8ABF-445E-B356-6B305BA8138F}" type="presParOf" srcId="{8B1B4F1D-2D47-424E-A584-851759644F8E}" destId="{706B7F3D-ED1C-4A92-8429-8EA7DD0F5A54}" srcOrd="5" destOrd="0" presId="urn:microsoft.com/office/officeart/2005/8/layout/arrow2"/>
-    <dgm:cxn modelId="{3285A0E2-F8FD-4106-878F-F66D49B53B3A}" type="presParOf" srcId="{8B1B4F1D-2D47-424E-A584-851759644F8E}" destId="{4596CD84-BB36-443E-BE91-5F042A626D2B}" srcOrd="6" destOrd="0" presId="urn:microsoft.com/office/officeart/2005/8/layout/arrow2"/>
-    <dgm:cxn modelId="{13FF3EBA-EA55-4209-A7CC-E764EB3D22D2}" type="presParOf" srcId="{8B1B4F1D-2D47-424E-A584-851759644F8E}" destId="{349F1428-BF2E-4EEB-883F-915A3C367AB8}" srcOrd="7" destOrd="0" presId="urn:microsoft.com/office/officeart/2005/8/layout/arrow2"/>
+    <dgm:cxn modelId="{54B990AD-9413-4AC6-B3EE-B2F9F7F41FF0}" type="presParOf" srcId="{2EBE3580-ADA9-4E8C-B2D4-803F5099181D}" destId="{A80D6553-DE0D-49D8-964E-CD9C8615925B}" srcOrd="1" destOrd="0" presId="urn:microsoft.com/office/officeart/2005/8/layout/arrow2"/>
+    <dgm:cxn modelId="{EE515A1F-DEDD-476B-BFEE-B890F6C5ED83}" type="presParOf" srcId="{A80D6553-DE0D-49D8-964E-CD9C8615925B}" destId="{95138DB0-D67C-4023-80CE-16CB65D35AFC}" srcOrd="0" destOrd="0" presId="urn:microsoft.com/office/officeart/2005/8/layout/arrow2"/>
+    <dgm:cxn modelId="{1F01107A-721B-49F4-9C17-93B759933947}" type="presParOf" srcId="{A80D6553-DE0D-49D8-964E-CD9C8615925B}" destId="{00360BD5-3E9A-4727-B999-F2F1F95368E2}" srcOrd="1" destOrd="0" presId="urn:microsoft.com/office/officeart/2005/8/layout/arrow2"/>
+    <dgm:cxn modelId="{61B5684B-FF6C-468F-84F8-00ABC7C080C3}" type="presParOf" srcId="{A80D6553-DE0D-49D8-964E-CD9C8615925B}" destId="{103FE9E7-938F-4C91-8DF0-40749CDC25AD}" srcOrd="2" destOrd="0" presId="urn:microsoft.com/office/officeart/2005/8/layout/arrow2"/>
+    <dgm:cxn modelId="{7B59EB93-9F8D-40F8-91B6-65465EA1DBE1}" type="presParOf" srcId="{A80D6553-DE0D-49D8-964E-CD9C8615925B}" destId="{8A7EE3DD-C1CB-4105-BE37-C41F1287079C}" srcOrd="3" destOrd="0" presId="urn:microsoft.com/office/officeart/2005/8/layout/arrow2"/>
+    <dgm:cxn modelId="{3AB82E86-4ACD-4CF8-8D82-AF0D6D42621E}" type="presParOf" srcId="{A80D6553-DE0D-49D8-964E-CD9C8615925B}" destId="{8466DCC2-7B2C-4CDE-8043-43E6480C76F0}" srcOrd="4" destOrd="0" presId="urn:microsoft.com/office/officeart/2005/8/layout/arrow2"/>
+    <dgm:cxn modelId="{3C6F2A57-8757-4A8F-87CA-B7358098D057}" type="presParOf" srcId="{A80D6553-DE0D-49D8-964E-CD9C8615925B}" destId="{6D432C6B-E212-4964-A36A-0E1AB8B1A039}" srcOrd="5" destOrd="0" presId="urn:microsoft.com/office/officeart/2005/8/layout/arrow2"/>
+    <dgm:cxn modelId="{816543DE-114B-4E86-AEFA-4CC8124B6C6E}" type="presParOf" srcId="{A80D6553-DE0D-49D8-964E-CD9C8615925B}" destId="{3C393ECE-37C3-41BD-91A5-C7CC4EFF730A}" srcOrd="6" destOrd="0" presId="urn:microsoft.com/office/officeart/2005/8/layout/arrow2"/>
+    <dgm:cxn modelId="{F92EE929-AD7A-4873-BA52-7222F6A4F577}" type="presParOf" srcId="{A80D6553-DE0D-49D8-964E-CD9C8615925B}" destId="{EAB58CAE-F16E-4FD4-A22D-C0A28B041634}" srcOrd="7" destOrd="0" presId="urn:microsoft.com/office/officeart/2005/8/layout/arrow2"/>
+    <dgm:cxn modelId="{9D009678-F6C3-4757-818E-A3A224F1371C}" type="presParOf" srcId="{A80D6553-DE0D-49D8-964E-CD9C8615925B}" destId="{D2CFB6A4-B995-4E7F-BF14-94BCD09CEEBE}" srcOrd="8" destOrd="0" presId="urn:microsoft.com/office/officeart/2005/8/layout/arrow2"/>
+    <dgm:cxn modelId="{6E153AF6-C204-4330-896B-D6097F64EC11}" type="presParOf" srcId="{A80D6553-DE0D-49D8-964E-CD9C8615925B}" destId="{06C988F4-6B20-4C25-96A1-F3D74561AB2C}" srcOrd="9" destOrd="0" presId="urn:microsoft.com/office/officeart/2005/8/layout/arrow2"/>
   </dgm:cxnLst>
   <dgm:bg>
     <a:noFill/>
@@ -1719,7 +1811,7 @@
         <a:fontRef idx="minor"/>
       </dsp:style>
     </dsp:sp>
-    <dsp:sp modelId="{FA3660C6-BA28-495D-B404-F49E2326BCDB}">
+    <dsp:sp modelId="{95138DB0-D67C-4023-80CE-16CB65D35AFC}">
       <dsp:nvSpPr>
         <dsp:cNvPr id="0" name=""/>
         <dsp:cNvSpPr/>
@@ -1769,7 +1861,7 @@
         </a:fontRef>
       </dsp:style>
     </dsp:sp>
-    <dsp:sp modelId="{6FC9AD64-090B-4F83-81B7-3E76765E1E8F}">
+    <dsp:sp modelId="{00360BD5-3E9A-4727-B999-F2F1F95368E2}">
       <dsp:nvSpPr>
         <dsp:cNvPr id="0" name=""/>
         <dsp:cNvSpPr/>
@@ -1777,7 +1869,7 @@
       <dsp:spPr>
         <a:xfrm>
           <a:off x="894355" y="3315719"/>
-          <a:ext cx="1190526" cy="1035618"/>
+          <a:ext cx="912040" cy="1035618"/>
         </a:xfrm>
         <a:prstGeom prst="rect">
           <a:avLst/>
@@ -1806,7 +1898,7 @@
         </a:bodyPr>
         <a:lstStyle/>
         <a:p>
-          <a:pPr marL="0" lvl="0" indent="0" algn="l" defTabSz="533400">
+          <a:pPr marL="0" lvl="0" indent="0" algn="l" defTabSz="444500">
             <a:lnSpc>
               <a:spcPct val="90000"/>
             </a:lnSpc>
@@ -1819,12 +1911,12 @@
             <a:buNone/>
           </a:pPr>
           <a:r>
-            <a:rPr lang="en-IN" sz="1200" kern="1200" dirty="0"/>
+            <a:rPr lang="en-IN" sz="1000" kern="1200" dirty="0"/>
             <a:t>Basic fiducial detection code</a:t>
           </a:r>
         </a:p>
         <a:p>
-          <a:pPr marL="57150" lvl="1" indent="-57150" algn="l" defTabSz="400050">
+          <a:pPr marL="57150" lvl="1" indent="-57150" algn="l" defTabSz="355600">
             <a:lnSpc>
               <a:spcPct val="90000"/>
             </a:lnSpc>
@@ -1837,12 +1929,12 @@
             <a:buChar char="•"/>
           </a:pPr>
           <a:r>
-            <a:rPr lang="en-IN" sz="900" kern="1200" dirty="0"/>
+            <a:rPr lang="en-IN" sz="800" kern="1200" dirty="0"/>
             <a:t>Basic detection of April-tags in cameras.</a:t>
           </a:r>
         </a:p>
         <a:p>
-          <a:pPr marL="57150" lvl="1" indent="-57150" algn="l" defTabSz="400050">
+          <a:pPr marL="57150" lvl="1" indent="-57150" algn="l" defTabSz="355600">
             <a:lnSpc>
               <a:spcPct val="90000"/>
             </a:lnSpc>
@@ -1855,34 +1947,34 @@
             <a:buChar char="•"/>
           </a:pPr>
           <a:r>
-            <a:rPr lang="en-IN" sz="900" kern="1200" dirty="0"/>
+            <a:rPr lang="en-IN" sz="800" kern="1200" dirty="0"/>
             <a:t>Standing SPOT once April-tag detected.</a:t>
           </a:r>
         </a:p>
       </dsp:txBody>
       <dsp:txXfrm>
         <a:off x="894355" y="3315719"/>
-        <a:ext cx="1190526" cy="1035618"/>
+        <a:ext cx="912040" cy="1035618"/>
       </dsp:txXfrm>
     </dsp:sp>
-    <dsp:sp modelId="{6E9332C1-6011-44BB-8DB2-ECD30D9D74CF}">
+    <dsp:sp modelId="{103FE9E7-938F-4C91-8DF0-40749CDC25AD}">
       <dsp:nvSpPr>
         <dsp:cNvPr id="0" name=""/>
         <dsp:cNvSpPr/>
       </dsp:nvSpPr>
       <dsp:spPr>
         <a:xfrm>
-          <a:off x="1945638" y="2223533"/>
-          <a:ext cx="278485" cy="278485"/>
+          <a:off x="1681077" y="2402808"/>
+          <a:ext cx="250637" cy="250637"/>
         </a:xfrm>
         <a:prstGeom prst="ellipse">
           <a:avLst/>
         </a:prstGeom>
         <a:solidFill>
           <a:schemeClr val="accent4">
-            <a:hueOff val="2199979"/>
-            <a:satOff val="-9734"/>
-            <a:lumOff val="-1634"/>
+            <a:hueOff val="1649984"/>
+            <a:satOff val="-7300"/>
+            <a:lumOff val="-1226"/>
             <a:alphaOff val="0"/>
           </a:schemeClr>
         </a:solidFill>
@@ -1915,15 +2007,15 @@
         </a:fontRef>
       </dsp:style>
     </dsp:sp>
-    <dsp:sp modelId="{6686508F-0ACF-4DD3-AF7B-159149581D5A}">
+    <dsp:sp modelId="{8A7EE3DD-C1CB-4105-BE37-C41F1287079C}">
       <dsp:nvSpPr>
         <dsp:cNvPr id="0" name=""/>
         <dsp:cNvSpPr/>
       </dsp:nvSpPr>
       <dsp:spPr>
         <a:xfrm>
-          <a:off x="2084881" y="2362776"/>
-          <a:ext cx="1462049" cy="1988561"/>
+          <a:off x="1806396" y="2528127"/>
+          <a:ext cx="1155715" cy="1823210"/>
         </a:xfrm>
         <a:prstGeom prst="rect">
           <a:avLst/>
@@ -1947,12 +2039,12 @@
         <a:fontRef idx="minor"/>
       </dsp:style>
       <dsp:txBody>
-        <a:bodyPr spcFirstLastPara="0" vert="horz" wrap="square" lIns="147564" tIns="0" rIns="0" bIns="0" numCol="1" spcCol="1270" anchor="t" anchorCtr="0">
+        <a:bodyPr spcFirstLastPara="0" vert="horz" wrap="square" lIns="132807" tIns="0" rIns="0" bIns="0" numCol="1" spcCol="1270" anchor="t" anchorCtr="0">
           <a:noAutofit/>
         </a:bodyPr>
         <a:lstStyle/>
         <a:p>
-          <a:pPr marL="0" lvl="0" indent="0" algn="l" defTabSz="533400">
+          <a:pPr marL="0" lvl="0" indent="0" algn="l" defTabSz="444500">
             <a:lnSpc>
               <a:spcPct val="90000"/>
             </a:lnSpc>
@@ -1965,12 +2057,12 @@
             <a:buNone/>
           </a:pPr>
           <a:r>
-            <a:rPr lang="en-IN" sz="1200" kern="1200" dirty="0"/>
+            <a:rPr lang="en-IN" sz="1000" kern="1200" dirty="0"/>
             <a:t>Displaying the cameras</a:t>
           </a:r>
         </a:p>
         <a:p>
-          <a:pPr marL="57150" lvl="1" indent="-57150" algn="l" defTabSz="400050">
+          <a:pPr marL="57150" lvl="1" indent="-57150" algn="l" defTabSz="355600">
             <a:lnSpc>
               <a:spcPct val="90000"/>
             </a:lnSpc>
@@ -1983,12 +2075,12 @@
             <a:buChar char="•"/>
           </a:pPr>
           <a:r>
-            <a:rPr lang="en-IN" sz="900" kern="1200" dirty="0"/>
+            <a:rPr lang="en-IN" sz="800" kern="1200" dirty="0"/>
             <a:t>Showing the live feed of all the cameras</a:t>
           </a:r>
         </a:p>
         <a:p>
-          <a:pPr marL="57150" lvl="1" indent="-57150" algn="l" defTabSz="400050">
+          <a:pPr marL="57150" lvl="1" indent="-57150" algn="l" defTabSz="355600">
             <a:lnSpc>
               <a:spcPct val="90000"/>
             </a:lnSpc>
@@ -2001,34 +2093,34 @@
             <a:buChar char="•"/>
           </a:pPr>
           <a:r>
-            <a:rPr lang="en-IN" sz="900" kern="1200" dirty="0"/>
+            <a:rPr lang="en-IN" sz="800" kern="1200" dirty="0"/>
             <a:t>Warning:  The code has crashed when the camera feed is given to the client.</a:t>
           </a:r>
         </a:p>
       </dsp:txBody>
       <dsp:txXfrm>
-        <a:off x="2084881" y="2362776"/>
-        <a:ext cx="1462049" cy="1988561"/>
+        <a:off x="1806396" y="2528127"/>
+        <a:ext cx="1155715" cy="1823210"/>
       </dsp:txXfrm>
     </dsp:sp>
-    <dsp:sp modelId="{6CF6C1E1-9BA3-43E5-A577-ECC1534D5C24}">
+    <dsp:sp modelId="{8466DCC2-7B2C-4CDE-8043-43E6480C76F0}">
       <dsp:nvSpPr>
         <dsp:cNvPr id="0" name=""/>
         <dsp:cNvSpPr/>
       </dsp:nvSpPr>
       <dsp:spPr>
         <a:xfrm>
-          <a:off x="3390283" y="1477714"/>
-          <a:ext cx="368993" cy="368993"/>
+          <a:off x="2795020" y="1738794"/>
+          <a:ext cx="334182" cy="334182"/>
         </a:xfrm>
         <a:prstGeom prst="ellipse">
           <a:avLst/>
         </a:prstGeom>
         <a:solidFill>
           <a:schemeClr val="accent4">
-            <a:hueOff val="4399958"/>
-            <a:satOff val="-19468"/>
-            <a:lumOff val="-3269"/>
+            <a:hueOff val="3299968"/>
+            <a:satOff val="-14601"/>
+            <a:lumOff val="-2452"/>
             <a:alphaOff val="0"/>
           </a:schemeClr>
         </a:solidFill>
@@ -2061,15 +2153,15 @@
         </a:fontRef>
       </dsp:style>
     </dsp:sp>
-    <dsp:sp modelId="{706B7F3D-ED1C-4A92-8429-8EA7DD0F5A54}">
+    <dsp:sp modelId="{6D432C6B-E212-4964-A36A-0E1AB8B1A039}">
       <dsp:nvSpPr>
         <dsp:cNvPr id="0" name=""/>
         <dsp:cNvSpPr/>
       </dsp:nvSpPr>
       <dsp:spPr>
         <a:xfrm>
-          <a:off x="3574779" y="1662211"/>
-          <a:ext cx="1462049" cy="2689126"/>
+          <a:off x="2962111" y="1905886"/>
+          <a:ext cx="1343693" cy="2445451"/>
         </a:xfrm>
         <a:prstGeom prst="rect">
           <a:avLst/>
@@ -2093,12 +2185,12 @@
         <a:fontRef idx="minor"/>
       </dsp:style>
       <dsp:txBody>
-        <a:bodyPr spcFirstLastPara="0" vert="horz" wrap="square" lIns="195522" tIns="0" rIns="0" bIns="0" numCol="1" spcCol="1270" anchor="t" anchorCtr="0">
+        <a:bodyPr spcFirstLastPara="0" vert="horz" wrap="square" lIns="177077" tIns="0" rIns="0" bIns="0" numCol="1" spcCol="1270" anchor="t" anchorCtr="0">
           <a:noAutofit/>
         </a:bodyPr>
         <a:lstStyle/>
         <a:p>
-          <a:pPr marL="0" lvl="0" indent="0" algn="l" defTabSz="533400">
+          <a:pPr marL="0" lvl="0" indent="0" algn="l" defTabSz="444500">
             <a:lnSpc>
               <a:spcPct val="90000"/>
             </a:lnSpc>
@@ -2111,12 +2203,12 @@
             <a:buNone/>
           </a:pPr>
           <a:r>
-            <a:rPr lang="en-IN" sz="1200" kern="1200" dirty="0"/>
+            <a:rPr lang="en-IN" sz="1000" kern="1200" dirty="0"/>
             <a:t>Displaying visible April-tags seen to user</a:t>
           </a:r>
         </a:p>
         <a:p>
-          <a:pPr marL="57150" lvl="1" indent="-57150" algn="l" defTabSz="400050">
+          <a:pPr marL="57150" lvl="1" indent="-57150" algn="l" defTabSz="355600">
             <a:lnSpc>
               <a:spcPct val="90000"/>
             </a:lnSpc>
@@ -2129,12 +2221,12 @@
             <a:buChar char="•"/>
           </a:pPr>
           <a:r>
-            <a:rPr lang="en-IN" sz="900" kern="1200" dirty="0"/>
+            <a:rPr lang="en-IN" sz="800" kern="1200" dirty="0"/>
             <a:t>Detecting all the tags visible</a:t>
           </a:r>
         </a:p>
         <a:p>
-          <a:pPr marL="57150" lvl="1" indent="-57150" algn="l" defTabSz="400050">
+          <a:pPr marL="57150" lvl="1" indent="-57150" algn="l" defTabSz="355600">
             <a:lnSpc>
               <a:spcPct val="90000"/>
             </a:lnSpc>
@@ -2147,20 +2239,20 @@
             <a:buChar char="•"/>
           </a:pPr>
           <a:r>
-            <a:rPr lang="en-IN" sz="900" kern="1200" dirty="0"/>
+            <a:rPr lang="en-IN" sz="800" kern="1200" dirty="0"/>
             <a:t>Showing all the tags visible in the </a:t>
           </a:r>
           <a:r>
-            <a:rPr lang="en-IN" sz="900" kern="1200" dirty="0" err="1"/>
+            <a:rPr lang="en-IN" sz="800" kern="1200" dirty="0" err="1"/>
             <a:t>cmd</a:t>
           </a:r>
           <a:r>
-            <a:rPr lang="en-IN" sz="900" kern="1200" dirty="0"/>
+            <a:rPr lang="en-IN" sz="800" kern="1200" dirty="0"/>
             <a:t> window.</a:t>
           </a:r>
         </a:p>
         <a:p>
-          <a:pPr marL="57150" lvl="1" indent="-57150" algn="l" defTabSz="400050">
+          <a:pPr marL="57150" lvl="1" indent="-57150" algn="l" defTabSz="355600">
             <a:lnSpc>
               <a:spcPct val="90000"/>
             </a:lnSpc>
@@ -2173,12 +2265,12 @@
             <a:buChar char="•"/>
           </a:pPr>
           <a:r>
-            <a:rPr lang="en-IN" sz="900" kern="1200" dirty="0"/>
+            <a:rPr lang="en-IN" sz="800" kern="1200" dirty="0"/>
             <a:t>Moving robot such that the front-right camera is aligned to the fiducial</a:t>
           </a:r>
         </a:p>
         <a:p>
-          <a:pPr marL="57150" lvl="1" indent="-57150" algn="l" defTabSz="400050">
+          <a:pPr marL="57150" lvl="1" indent="-57150" algn="l" defTabSz="355600">
             <a:lnSpc>
               <a:spcPct val="90000"/>
             </a:lnSpc>
@@ -2191,25 +2283,233 @@
             <a:buChar char="•"/>
           </a:pPr>
           <a:r>
-            <a:rPr lang="en-IN" sz="900" kern="1200" dirty="0"/>
-            <a:t>Changing the buffer distance and the speed</a:t>
+            <a:rPr lang="en-IN" sz="800" kern="1200" dirty="0"/>
+            <a:t>Changing the distance margin and the speed</a:t>
           </a:r>
         </a:p>
       </dsp:txBody>
       <dsp:txXfrm>
-        <a:off x="3574779" y="1662211"/>
-        <a:ext cx="1462049" cy="2689126"/>
+        <a:off x="2962111" y="1905886"/>
+        <a:ext cx="1343693" cy="2445451"/>
       </dsp:txXfrm>
     </dsp:sp>
-    <dsp:sp modelId="{4596CD84-BB36-443E-BE91-5F042A626D2B}">
+    <dsp:sp modelId="{3C393ECE-37C3-41BD-91A5-C7CC4EFF730A}">
       <dsp:nvSpPr>
         <dsp:cNvPr id="0" name=""/>
         <dsp:cNvSpPr/>
       </dsp:nvSpPr>
       <dsp:spPr>
         <a:xfrm>
-          <a:off x="4963726" y="984272"/>
-          <a:ext cx="494311" cy="494311"/>
+          <a:off x="4089978" y="1220115"/>
+          <a:ext cx="431652" cy="431652"/>
+        </a:xfrm>
+        <a:prstGeom prst="ellipse">
+          <a:avLst/>
+        </a:prstGeom>
+        <a:solidFill>
+          <a:schemeClr val="accent4">
+            <a:hueOff val="4949952"/>
+            <a:satOff val="-21901"/>
+            <a:lumOff val="-3677"/>
+            <a:alphaOff val="0"/>
+          </a:schemeClr>
+        </a:solidFill>
+        <a:ln w="19050" cap="flat" cmpd="sng" algn="ctr">
+          <a:solidFill>
+            <a:schemeClr val="lt1">
+              <a:hueOff val="0"/>
+              <a:satOff val="0"/>
+              <a:lumOff val="0"/>
+              <a:alphaOff val="0"/>
+            </a:schemeClr>
+          </a:solidFill>
+          <a:prstDash val="solid"/>
+          <a:miter lim="800000"/>
+        </a:ln>
+        <a:effectLst/>
+      </dsp:spPr>
+      <dsp:style>
+        <a:lnRef idx="2">
+          <a:scrgbClr r="0" g="0" b="0"/>
+        </a:lnRef>
+        <a:fillRef idx="1">
+          <a:scrgbClr r="0" g="0" b="0"/>
+        </a:fillRef>
+        <a:effectRef idx="0">
+          <a:scrgbClr r="0" g="0" b="0"/>
+        </a:effectRef>
+        <a:fontRef idx="minor">
+          <a:schemeClr val="lt1"/>
+        </a:fontRef>
+      </dsp:style>
+    </dsp:sp>
+    <dsp:sp modelId="{EAB58CAE-F16E-4FD4-A22D-C0A28B041634}">
+      <dsp:nvSpPr>
+        <dsp:cNvPr id="0" name=""/>
+        <dsp:cNvSpPr/>
+      </dsp:nvSpPr>
+      <dsp:spPr>
+        <a:xfrm>
+          <a:off x="4305804" y="1435941"/>
+          <a:ext cx="1392428" cy="2915396"/>
+        </a:xfrm>
+        <a:prstGeom prst="rect">
+          <a:avLst/>
+        </a:prstGeom>
+        <a:noFill/>
+        <a:ln>
+          <a:noFill/>
+        </a:ln>
+        <a:effectLst/>
+      </dsp:spPr>
+      <dsp:style>
+        <a:lnRef idx="0">
+          <a:scrgbClr r="0" g="0" b="0"/>
+        </a:lnRef>
+        <a:fillRef idx="0">
+          <a:scrgbClr r="0" g="0" b="0"/>
+        </a:fillRef>
+        <a:effectRef idx="0">
+          <a:scrgbClr r="0" g="0" b="0"/>
+        </a:effectRef>
+        <a:fontRef idx="minor"/>
+      </dsp:style>
+      <dsp:txBody>
+        <a:bodyPr spcFirstLastPara="0" vert="horz" wrap="square" lIns="228724" tIns="0" rIns="0" bIns="0" numCol="1" spcCol="1270" anchor="t" anchorCtr="0">
+          <a:noAutofit/>
+        </a:bodyPr>
+        <a:lstStyle/>
+        <a:p>
+          <a:pPr marL="0" lvl="0" indent="0" algn="l" defTabSz="444500">
+            <a:lnSpc>
+              <a:spcPct val="90000"/>
+            </a:lnSpc>
+            <a:spcBef>
+              <a:spcPct val="0"/>
+            </a:spcBef>
+            <a:spcAft>
+              <a:spcPct val="35000"/>
+            </a:spcAft>
+            <a:buNone/>
+          </a:pPr>
+          <a:r>
+            <a:rPr lang="en-IN" sz="1000" kern="1200" dirty="0"/>
+            <a:t>Adding more user inputs</a:t>
+          </a:r>
+        </a:p>
+        <a:p>
+          <a:pPr marL="57150" lvl="1" indent="-57150" algn="l" defTabSz="355600">
+            <a:lnSpc>
+              <a:spcPct val="90000"/>
+            </a:lnSpc>
+            <a:spcBef>
+              <a:spcPct val="0"/>
+            </a:spcBef>
+            <a:spcAft>
+              <a:spcPct val="15000"/>
+            </a:spcAft>
+            <a:buChar char="•"/>
+          </a:pPr>
+          <a:r>
+            <a:rPr lang="en-IN" sz="800" kern="1200" dirty="0"/>
+            <a:t>Finding another tag and following it</a:t>
+          </a:r>
+        </a:p>
+        <a:p>
+          <a:pPr marL="57150" lvl="1" indent="-57150" algn="l" defTabSz="355600">
+            <a:lnSpc>
+              <a:spcPct val="90000"/>
+            </a:lnSpc>
+            <a:spcBef>
+              <a:spcPct val="0"/>
+            </a:spcBef>
+            <a:spcAft>
+              <a:spcPct val="15000"/>
+            </a:spcAft>
+            <a:buChar char="•"/>
+          </a:pPr>
+          <a:r>
+            <a:rPr lang="en-IN" sz="800" kern="1200" dirty="0"/>
+            <a:t>Quit option</a:t>
+          </a:r>
+        </a:p>
+        <a:p>
+          <a:pPr marL="57150" lvl="1" indent="-57150" algn="l" defTabSz="355600">
+            <a:lnSpc>
+              <a:spcPct val="90000"/>
+            </a:lnSpc>
+            <a:spcBef>
+              <a:spcPct val="0"/>
+            </a:spcBef>
+            <a:spcAft>
+              <a:spcPct val="15000"/>
+            </a:spcAft>
+            <a:buChar char="•"/>
+          </a:pPr>
+          <a:r>
+            <a:rPr lang="en-IN" sz="800" kern="1200" dirty="0"/>
+            <a:t>Rotating 90 degrees and search</a:t>
+          </a:r>
+        </a:p>
+        <a:p>
+          <a:pPr marL="57150" lvl="1" indent="-57150" algn="l" defTabSz="355600">
+            <a:lnSpc>
+              <a:spcPct val="90000"/>
+            </a:lnSpc>
+            <a:spcBef>
+              <a:spcPct val="0"/>
+            </a:spcBef>
+            <a:spcAft>
+              <a:spcPct val="15000"/>
+            </a:spcAft>
+            <a:buChar char="•"/>
+          </a:pPr>
+          <a:r>
+            <a:rPr lang="en-IN" sz="800" kern="1200" dirty="0"/>
+            <a:t>Staying at the same place</a:t>
+          </a:r>
+        </a:p>
+        <a:p>
+          <a:pPr marL="57150" lvl="1" indent="-57150" algn="l" defTabSz="355600">
+            <a:lnSpc>
+              <a:spcPct val="90000"/>
+            </a:lnSpc>
+            <a:spcBef>
+              <a:spcPct val="0"/>
+            </a:spcBef>
+            <a:spcAft>
+              <a:spcPct val="15000"/>
+            </a:spcAft>
+            <a:buChar char="•"/>
+          </a:pPr>
+          <a:r>
+            <a:rPr lang="en-IN" sz="800" kern="1200" dirty="0"/>
+            <a:t>And printing more info in the </a:t>
+          </a:r>
+          <a:r>
+            <a:rPr lang="en-IN" sz="800" kern="1200" dirty="0" err="1"/>
+            <a:t>cmd</a:t>
+          </a:r>
+          <a:r>
+            <a:rPr lang="en-IN" sz="800" kern="1200" dirty="0"/>
+            <a:t> window</a:t>
+          </a:r>
+        </a:p>
+      </dsp:txBody>
+      <dsp:txXfrm>
+        <a:off x="4305804" y="1435941"/>
+        <a:ext cx="1392428" cy="2915396"/>
+      </dsp:txXfrm>
+    </dsp:sp>
+    <dsp:sp modelId="{D2CFB6A4-B995-4E7F-BF14-94BCD09CEEBE}">
+      <dsp:nvSpPr>
+        <dsp:cNvPr id="0" name=""/>
+        <dsp:cNvSpPr/>
+      </dsp:nvSpPr>
+      <dsp:spPr>
+        <a:xfrm>
+          <a:off x="5423228" y="873748"/>
+          <a:ext cx="550009" cy="550009"/>
         </a:xfrm>
         <a:prstGeom prst="ellipse">
           <a:avLst/>
@@ -2251,15 +2551,15 @@
         </a:fontRef>
       </dsp:style>
     </dsp:sp>
-    <dsp:sp modelId="{349F1428-BF2E-4EEB-883F-915A3C367AB8}">
+    <dsp:sp modelId="{06C988F4-6B20-4C25-96A1-F3D74561AB2C}">
       <dsp:nvSpPr>
         <dsp:cNvPr id="0" name=""/>
         <dsp:cNvSpPr/>
       </dsp:nvSpPr>
       <dsp:spPr>
         <a:xfrm>
-          <a:off x="5210882" y="1231428"/>
-          <a:ext cx="1462049" cy="3119909"/>
+          <a:off x="5698232" y="1148753"/>
+          <a:ext cx="1392428" cy="3202584"/>
         </a:xfrm>
         <a:prstGeom prst="rect">
           <a:avLst/>
@@ -2283,12 +2583,12 @@
         <a:fontRef idx="minor"/>
       </dsp:style>
       <dsp:txBody>
-        <a:bodyPr spcFirstLastPara="0" vert="horz" wrap="square" lIns="261926" tIns="0" rIns="0" bIns="0" numCol="1" spcCol="1270" anchor="t" anchorCtr="0">
+        <a:bodyPr spcFirstLastPara="0" vert="horz" wrap="square" lIns="291438" tIns="0" rIns="0" bIns="0" numCol="1" spcCol="1270" anchor="t" anchorCtr="0">
           <a:noAutofit/>
         </a:bodyPr>
         <a:lstStyle/>
         <a:p>
-          <a:pPr marL="0" lvl="0" indent="0" algn="l" defTabSz="533400">
+          <a:pPr marL="0" lvl="0" indent="0" algn="l" defTabSz="444500">
             <a:lnSpc>
               <a:spcPct val="90000"/>
             </a:lnSpc>
@@ -2301,12 +2601,12 @@
             <a:buNone/>
           </a:pPr>
           <a:r>
-            <a:rPr lang="en-IN" sz="1200" kern="1200" dirty="0"/>
-            <a:t>Adding more user inputs</a:t>
+            <a:rPr lang="en-IN" sz="1000" kern="1200" dirty="0"/>
+            <a:t>Camera capture</a:t>
           </a:r>
         </a:p>
         <a:p>
-          <a:pPr marL="57150" lvl="1" indent="-57150" algn="l" defTabSz="400050">
+          <a:pPr marL="57150" lvl="1" indent="-57150" algn="l" defTabSz="355600">
             <a:lnSpc>
               <a:spcPct val="90000"/>
             </a:lnSpc>
@@ -2319,94 +2619,14 @@
             <a:buChar char="•"/>
           </a:pPr>
           <a:r>
-            <a:rPr lang="en-IN" sz="900" kern="1200" dirty="0"/>
-            <a:t>Finding another tag and following it</a:t>
-          </a:r>
-        </a:p>
-        <a:p>
-          <a:pPr marL="57150" lvl="1" indent="-57150" algn="l" defTabSz="400050">
-            <a:lnSpc>
-              <a:spcPct val="90000"/>
-            </a:lnSpc>
-            <a:spcBef>
-              <a:spcPct val="0"/>
-            </a:spcBef>
-            <a:spcAft>
-              <a:spcPct val="15000"/>
-            </a:spcAft>
-            <a:buChar char="•"/>
-          </a:pPr>
-          <a:r>
-            <a:rPr lang="en-IN" sz="900" kern="1200" dirty="0"/>
-            <a:t>Quit option</a:t>
-          </a:r>
-        </a:p>
-        <a:p>
-          <a:pPr marL="57150" lvl="1" indent="-57150" algn="l" defTabSz="400050">
-            <a:lnSpc>
-              <a:spcPct val="90000"/>
-            </a:lnSpc>
-            <a:spcBef>
-              <a:spcPct val="0"/>
-            </a:spcBef>
-            <a:spcAft>
-              <a:spcPct val="15000"/>
-            </a:spcAft>
-            <a:buChar char="•"/>
-          </a:pPr>
-          <a:r>
-            <a:rPr lang="en-IN" sz="900" kern="1200" dirty="0"/>
-            <a:t>Rotating 90 degrees and search</a:t>
-          </a:r>
-        </a:p>
-        <a:p>
-          <a:pPr marL="57150" lvl="1" indent="-57150" algn="l" defTabSz="400050">
-            <a:lnSpc>
-              <a:spcPct val="90000"/>
-            </a:lnSpc>
-            <a:spcBef>
-              <a:spcPct val="0"/>
-            </a:spcBef>
-            <a:spcAft>
-              <a:spcPct val="15000"/>
-            </a:spcAft>
-            <a:buChar char="•"/>
-          </a:pPr>
-          <a:r>
-            <a:rPr lang="en-IN" sz="900" kern="1200" dirty="0"/>
-            <a:t>Staying at the same place</a:t>
-          </a:r>
-        </a:p>
-        <a:p>
-          <a:pPr marL="57150" lvl="1" indent="-57150" algn="l" defTabSz="400050">
-            <a:lnSpc>
-              <a:spcPct val="90000"/>
-            </a:lnSpc>
-            <a:spcBef>
-              <a:spcPct val="0"/>
-            </a:spcBef>
-            <a:spcAft>
-              <a:spcPct val="15000"/>
-            </a:spcAft>
-            <a:buChar char="•"/>
-          </a:pPr>
-          <a:r>
-            <a:rPr lang="en-IN" sz="900" kern="1200" dirty="0"/>
-            <a:t>And printing more info in the </a:t>
-          </a:r>
-          <a:r>
-            <a:rPr lang="en-IN" sz="900" kern="1200" dirty="0" err="1"/>
-            <a:t>cmd</a:t>
-          </a:r>
-          <a:r>
-            <a:rPr lang="en-IN" sz="900" kern="1200" dirty="0"/>
-            <a:t> window</a:t>
+            <a:rPr lang="en-IN" sz="800" kern="1200" dirty="0"/>
+            <a:t>The images from all cameras are captured when client gives the command.</a:t>
           </a:r>
         </a:p>
       </dsp:txBody>
       <dsp:txXfrm>
-        <a:off x="5210882" y="1231428"/>
-        <a:ext cx="1462049" cy="3119909"/>
+        <a:off x="5698232" y="1148753"/>
+        <a:ext cx="1392428" cy="3202584"/>
       </dsp:txXfrm>
     </dsp:sp>
   </dsp:spTree>
@@ -5442,6 +5662,110 @@
 </p:notesMaster>
 </file>
 
+<file path=ppt/notesSlides/notesSlide1.xml><?xml version="1.0" encoding="utf-8"?>
+<p:notes xmlns:a="http://schemas.openxmlformats.org/drawingml/2006/main" xmlns:r="http://schemas.openxmlformats.org/officeDocument/2006/relationships" xmlns:p="http://schemas.openxmlformats.org/presentationml/2006/main" showMasterSp="0" showMasterPhAnim="0">
+  <p:cSld>
+    <p:spTree>
+      <p:nvGrpSpPr>
+        <p:cNvPr id="1" name="Shape 59"/>
+        <p:cNvGrpSpPr/>
+        <p:nvPr/>
+      </p:nvGrpSpPr>
+      <p:grpSpPr>
+        <a:xfrm>
+          <a:off x="0" y="0"/>
+          <a:ext cx="0" cy="0"/>
+          <a:chOff x="0" y="0"/>
+          <a:chExt cx="0" cy="0"/>
+        </a:xfrm>
+      </p:grpSpPr>
+      <p:sp>
+        <p:nvSpPr>
+          <p:cNvPr id="60" name="Google Shape;60;p:notes"/>
+          <p:cNvSpPr>
+            <a:spLocks noGrp="1" noRot="1" noChangeAspect="1"/>
+          </p:cNvSpPr>
+          <p:nvPr>
+            <p:ph type="sldImg" idx="2"/>
+          </p:nvPr>
+        </p:nvSpPr>
+        <p:spPr>
+          <a:xfrm>
+            <a:off x="381000" y="685800"/>
+            <a:ext cx="6096000" cy="3429000"/>
+          </a:xfrm>
+          <a:custGeom>
+            <a:avLst/>
+            <a:gdLst/>
+            <a:ahLst/>
+            <a:cxnLst/>
+            <a:rect l="l" t="t" r="r" b="b"/>
+            <a:pathLst>
+              <a:path w="120000" h="120000" extrusionOk="0">
+                <a:moveTo>
+                  <a:pt x="0" y="0"/>
+                </a:moveTo>
+                <a:lnTo>
+                  <a:pt x="120000" y="0"/>
+                </a:lnTo>
+                <a:lnTo>
+                  <a:pt x="120000" y="120000"/>
+                </a:lnTo>
+                <a:lnTo>
+                  <a:pt x="0" y="120000"/>
+                </a:lnTo>
+                <a:close/>
+              </a:path>
+            </a:pathLst>
+          </a:custGeom>
+        </p:spPr>
+      </p:sp>
+      <p:sp>
+        <p:nvSpPr>
+          <p:cNvPr id="61" name="Google Shape;61;p:notes"/>
+          <p:cNvSpPr txBox="1">
+            <a:spLocks noGrp="1"/>
+          </p:cNvSpPr>
+          <p:nvPr>
+            <p:ph type="body" idx="1"/>
+          </p:nvPr>
+        </p:nvSpPr>
+        <p:spPr>
+          <a:xfrm>
+            <a:off x="685800" y="4343400"/>
+            <a:ext cx="5486400" cy="4114800"/>
+          </a:xfrm>
+          <a:prstGeom prst="rect">
+            <a:avLst/>
+          </a:prstGeom>
+        </p:spPr>
+        <p:txBody>
+          <a:bodyPr spcFirstLastPara="1" wrap="square" lIns="91425" tIns="91425" rIns="91425" bIns="91425" anchor="t" anchorCtr="0">
+            <a:noAutofit/>
+          </a:bodyPr>
+          <a:lstStyle/>
+          <a:p>
+            <a:pPr marL="0" lvl="0" indent="0" algn="l" rtl="0">
+              <a:spcBef>
+                <a:spcPts val="0"/>
+              </a:spcBef>
+              <a:spcAft>
+                <a:spcPts val="0"/>
+              </a:spcAft>
+              <a:buNone/>
+            </a:pPr>
+            <a:endParaRPr/>
+          </a:p>
+        </p:txBody>
+      </p:sp>
+    </p:spTree>
+  </p:cSld>
+  <p:clrMapOvr>
+    <a:masterClrMapping/>
+  </p:clrMapOvr>
+</p:notes>
+</file>
+
 <file path=ppt/slideLayouts/slideLayout1.xml><?xml version="1.0" encoding="utf-8"?>
 <p:sldLayout xmlns:a="http://schemas.openxmlformats.org/drawingml/2006/main" xmlns:r="http://schemas.openxmlformats.org/officeDocument/2006/relationships" xmlns:p="http://schemas.openxmlformats.org/presentationml/2006/main" type="title" preserve="1">
   <p:cSld name="Title Slide">
@@ -8969,6 +9293,215 @@
   <p:cSld>
     <p:spTree>
       <p:nvGrpSpPr>
+        <p:cNvPr id="1" name="Shape 62"/>
+        <p:cNvGrpSpPr/>
+        <p:nvPr/>
+      </p:nvGrpSpPr>
+      <p:grpSpPr>
+        <a:xfrm>
+          <a:off x="0" y="0"/>
+          <a:ext cx="0" cy="0"/>
+          <a:chOff x="0" y="0"/>
+          <a:chExt cx="0" cy="0"/>
+        </a:xfrm>
+      </p:grpSpPr>
+      <p:sp>
+        <p:nvSpPr>
+          <p:cNvPr id="63" name="Google Shape;63;p14"/>
+          <p:cNvSpPr txBox="1">
+            <a:spLocks noGrp="1"/>
+          </p:cNvSpPr>
+          <p:nvPr>
+            <p:ph type="ctrTitle"/>
+          </p:nvPr>
+        </p:nvSpPr>
+        <p:spPr>
+          <a:xfrm>
+            <a:off x="415600" y="992767"/>
+            <a:ext cx="11360800" cy="1162400"/>
+          </a:xfrm>
+          <a:prstGeom prst="rect">
+            <a:avLst/>
+          </a:prstGeom>
+        </p:spPr>
+        <p:txBody>
+          <a:bodyPr spcFirstLastPara="1" vert="horz" wrap="square" lIns="121900" tIns="121900" rIns="121900" bIns="121900" rtlCol="0" anchor="b" anchorCtr="0">
+            <a:normAutofit/>
+          </a:bodyPr>
+          <a:lstStyle/>
+          <a:p>
+            <a:pPr>
+              <a:spcBef>
+                <a:spcPts val="0"/>
+              </a:spcBef>
+            </a:pPr>
+            <a:r>
+              <a:rPr lang="en"/>
+              <a:t>Goals</a:t>
+            </a:r>
+            <a:endParaRPr/>
+          </a:p>
+        </p:txBody>
+      </p:sp>
+      <p:sp>
+        <p:nvSpPr>
+          <p:cNvPr id="64" name="Google Shape;64;p14"/>
+          <p:cNvSpPr txBox="1">
+            <a:spLocks noGrp="1"/>
+          </p:cNvSpPr>
+          <p:nvPr>
+            <p:ph type="subTitle" idx="1"/>
+          </p:nvPr>
+        </p:nvSpPr>
+        <p:spPr>
+          <a:xfrm>
+            <a:off x="415600" y="2347300"/>
+            <a:ext cx="11360800" cy="1306000"/>
+          </a:xfrm>
+          <a:prstGeom prst="rect">
+            <a:avLst/>
+          </a:prstGeom>
+        </p:spPr>
+        <p:txBody>
+          <a:bodyPr spcFirstLastPara="1" vert="horz" wrap="square" lIns="121900" tIns="121900" rIns="121900" bIns="121900" rtlCol="0" anchor="t" anchorCtr="0">
+            <a:normAutofit/>
+          </a:bodyPr>
+          <a:lstStyle/>
+          <a:p>
+            <a:pPr>
+              <a:spcBef>
+                <a:spcPts val="0"/>
+              </a:spcBef>
+            </a:pPr>
+            <a:r>
+              <a:rPr lang="en"/>
+              <a:t>Detect AprilTags using onboard cameras and Follow the AprilTags on user command</a:t>
+            </a:r>
+            <a:endParaRPr/>
+          </a:p>
+        </p:txBody>
+      </p:sp>
+      <p:pic>
+        <p:nvPicPr>
+          <p:cNvPr id="65" name="Google Shape;65;p14"/>
+          <p:cNvPicPr preferRelativeResize="0"/>
+          <p:nvPr/>
+        </p:nvPicPr>
+        <p:blipFill>
+          <a:blip r:embed="rId3">
+            <a:alphaModFix/>
+          </a:blip>
+          <a:stretch>
+            <a:fillRect/>
+          </a:stretch>
+        </p:blipFill>
+        <p:spPr>
+          <a:xfrm>
+            <a:off x="203201" y="3856501"/>
+            <a:ext cx="4974756" cy="2798300"/>
+          </a:xfrm>
+          <a:prstGeom prst="rect">
+            <a:avLst/>
+          </a:prstGeom>
+          <a:noFill/>
+          <a:ln>
+            <a:noFill/>
+          </a:ln>
+        </p:spPr>
+      </p:pic>
+      <p:pic>
+        <p:nvPicPr>
+          <p:cNvPr id="66" name="Google Shape;66;p14"/>
+          <p:cNvPicPr preferRelativeResize="0"/>
+          <p:nvPr/>
+        </p:nvPicPr>
+        <p:blipFill>
+          <a:blip r:embed="rId4">
+            <a:alphaModFix/>
+          </a:blip>
+          <a:stretch>
+            <a:fillRect/>
+          </a:stretch>
+        </p:blipFill>
+        <p:spPr>
+          <a:xfrm>
+            <a:off x="8293392" y="3429000"/>
+            <a:ext cx="2798299" cy="2798299"/>
+          </a:xfrm>
+          <a:prstGeom prst="rect">
+            <a:avLst/>
+          </a:prstGeom>
+          <a:noFill/>
+          <a:ln>
+            <a:noFill/>
+          </a:ln>
+        </p:spPr>
+      </p:pic>
+      <p:cxnSp>
+        <p:nvCxnSpPr>
+          <p:cNvPr id="67" name="Google Shape;67;p14"/>
+          <p:cNvCxnSpPr/>
+          <p:nvPr/>
+        </p:nvCxnSpPr>
+        <p:spPr>
+          <a:xfrm>
+            <a:off x="5372233" y="4308133"/>
+            <a:ext cx="2419200" cy="11200"/>
+          </a:xfrm>
+          <a:prstGeom prst="straightConnector1">
+            <a:avLst/>
+          </a:prstGeom>
+          <a:noFill/>
+          <a:ln w="76200" cap="flat" cmpd="sng">
+            <a:solidFill>
+              <a:schemeClr val="dk2"/>
+            </a:solidFill>
+            <a:prstDash val="solid"/>
+            <a:round/>
+            <a:headEnd type="none" w="med" len="med"/>
+            <a:tailEnd type="triangle" w="med" len="med"/>
+          </a:ln>
+        </p:spPr>
+      </p:cxnSp>
+      <p:cxnSp>
+        <p:nvCxnSpPr>
+          <p:cNvPr id="68" name="Google Shape;68;p14"/>
+          <p:cNvCxnSpPr/>
+          <p:nvPr/>
+        </p:nvCxnSpPr>
+        <p:spPr>
+          <a:xfrm flipH="1">
+            <a:off x="5483300" y="5195900"/>
+            <a:ext cx="2319200" cy="22400"/>
+          </a:xfrm>
+          <a:prstGeom prst="straightConnector1">
+            <a:avLst/>
+          </a:prstGeom>
+          <a:noFill/>
+          <a:ln w="76200" cap="flat" cmpd="sng">
+            <a:solidFill>
+              <a:schemeClr val="dk2"/>
+            </a:solidFill>
+            <a:prstDash val="solid"/>
+            <a:round/>
+            <a:headEnd type="none" w="med" len="med"/>
+            <a:tailEnd type="triangle" w="med" len="med"/>
+          </a:ln>
+        </p:spPr>
+      </p:cxnSp>
+    </p:spTree>
+  </p:cSld>
+  <p:clrMapOvr>
+    <a:masterClrMapping/>
+  </p:clrMapOvr>
+</p:sld>
+</file>
+
+<file path=ppt/slides/slide3.xml><?xml version="1.0" encoding="utf-8"?>
+<p:sld xmlns:a="http://schemas.openxmlformats.org/drawingml/2006/main" xmlns:r="http://schemas.openxmlformats.org/officeDocument/2006/relationships" xmlns:p="http://schemas.openxmlformats.org/presentationml/2006/main">
+  <p:cSld>
+    <p:spTree>
+      <p:nvGrpSpPr>
         <p:cNvPr id="1" name=""/>
         <p:cNvGrpSpPr/>
         <p:nvPr/>
@@ -9080,7 +9613,7 @@
                 <a:latin typeface="Times New Roman" panose="02020603050405020304" pitchFamily="18" charset="0"/>
                 <a:cs typeface="Times New Roman" panose="02020603050405020304" pitchFamily="18" charset="0"/>
               </a:rPr>
-              <a:t>Fiducial follow command</a:t>
+              <a:t>April-tag follow command</a:t>
             </a:r>
           </a:p>
         </p:txBody>
@@ -9166,7 +9699,7 @@
           <a:p>
             <a:fld id="{516988D0-1470-4690-BDE1-E3A50181EF78}" type="slidenum">
               <a:rPr lang="de-DE" smtClean="0"/>
-              <a:t>2</a:t>
+              <a:t>3</a:t>
             </a:fld>
             <a:endParaRPr lang="de-DE"/>
           </a:p>
@@ -9188,7 +9721,7 @@
             <p:ph idx="1"/>
             <p:extLst>
               <p:ext uri="{D42A27DB-BD31-4B8C-83A1-F6EECF244321}">
-                <p14:modId xmlns:p14="http://schemas.microsoft.com/office/powerpoint/2010/main" val="2230858084"/>
+                <p14:modId xmlns:p14="http://schemas.microsoft.com/office/powerpoint/2010/main" val="3016630811"/>
               </p:ext>
             </p:extLst>
           </p:nvPr>
@@ -9240,7 +9773,7 @@
             </a:br>
             <a:r>
               <a:rPr lang="en-IN" dirty="0"/>
-              <a:t>process in making a fiducial follow</a:t>
+              <a:t>process in making a April-tag follow</a:t>
             </a:r>
           </a:p>
         </p:txBody>
@@ -9258,7 +9791,479 @@
 </p:sld>
 </file>
 
-<file path=ppt/slides/slide3.xml><?xml version="1.0" encoding="utf-8"?>
+<file path=ppt/slides/slide4.xml><?xml version="1.0" encoding="utf-8"?>
+<p:sld xmlns:a="http://schemas.openxmlformats.org/drawingml/2006/main" xmlns:r="http://schemas.openxmlformats.org/officeDocument/2006/relationships" xmlns:p="http://schemas.openxmlformats.org/presentationml/2006/main">
+  <p:cSld>
+    <p:spTree>
+      <p:nvGrpSpPr>
+        <p:cNvPr id="1" name=""/>
+        <p:cNvGrpSpPr/>
+        <p:nvPr/>
+      </p:nvGrpSpPr>
+      <p:grpSpPr>
+        <a:xfrm>
+          <a:off x="0" y="0"/>
+          <a:ext cx="0" cy="0"/>
+          <a:chOff x="0" y="0"/>
+          <a:chExt cx="0" cy="0"/>
+        </a:xfrm>
+      </p:grpSpPr>
+      <p:sp>
+        <p:nvSpPr>
+          <p:cNvPr id="5" name="Date Placeholder 4">
+            <a:extLst>
+              <a:ext uri="{FF2B5EF4-FFF2-40B4-BE49-F238E27FC236}">
+                <a16:creationId xmlns:a16="http://schemas.microsoft.com/office/drawing/2014/main" id="{ABE3CA3D-C0CD-E400-FA01-66CB55FF90EC}"/>
+              </a:ext>
+            </a:extLst>
+          </p:cNvPr>
+          <p:cNvSpPr>
+            <a:spLocks noGrp="1"/>
+          </p:cNvSpPr>
+          <p:nvPr>
+            <p:ph type="dt" sz="half" idx="10"/>
+          </p:nvPr>
+        </p:nvSpPr>
+        <p:spPr/>
+        <p:txBody>
+          <a:bodyPr/>
+          <a:lstStyle/>
+          <a:p>
+            <a:r>
+              <a:rPr lang="en-US"/>
+              <a:t>14.07.2025</a:t>
+            </a:r>
+            <a:endParaRPr lang="de-DE"/>
+          </a:p>
+        </p:txBody>
+      </p:sp>
+      <p:sp>
+        <p:nvSpPr>
+          <p:cNvPr id="6" name="Footer Placeholder 5">
+            <a:extLst>
+              <a:ext uri="{FF2B5EF4-FFF2-40B4-BE49-F238E27FC236}">
+                <a16:creationId xmlns:a16="http://schemas.microsoft.com/office/drawing/2014/main" id="{CD24AF8E-1FF2-92E1-1E89-51B498CAD98B}"/>
+              </a:ext>
+            </a:extLst>
+          </p:cNvPr>
+          <p:cNvSpPr>
+            <a:spLocks noGrp="1"/>
+          </p:cNvSpPr>
+          <p:nvPr>
+            <p:ph type="ftr" sz="quarter" idx="11"/>
+          </p:nvPr>
+        </p:nvSpPr>
+        <p:spPr/>
+        <p:txBody>
+          <a:bodyPr/>
+          <a:lstStyle/>
+          <a:p>
+            <a:r>
+              <a:rPr lang="en-IN"/>
+              <a:t>IDT projects | GDSPOT | SoSe 2025</a:t>
+            </a:r>
+            <a:endParaRPr lang="de-DE"/>
+          </a:p>
+        </p:txBody>
+      </p:sp>
+      <p:sp>
+        <p:nvSpPr>
+          <p:cNvPr id="7" name="Slide Number Placeholder 6">
+            <a:extLst>
+              <a:ext uri="{FF2B5EF4-FFF2-40B4-BE49-F238E27FC236}">
+                <a16:creationId xmlns:a16="http://schemas.microsoft.com/office/drawing/2014/main" id="{476773DE-20F9-11CA-92F6-8F04490DDD3E}"/>
+              </a:ext>
+            </a:extLst>
+          </p:cNvPr>
+          <p:cNvSpPr>
+            <a:spLocks noGrp="1"/>
+          </p:cNvSpPr>
+          <p:nvPr>
+            <p:ph type="sldNum" sz="quarter" idx="12"/>
+          </p:nvPr>
+        </p:nvSpPr>
+        <p:spPr/>
+        <p:txBody>
+          <a:bodyPr/>
+          <a:lstStyle/>
+          <a:p>
+            <a:fld id="{516988D0-1470-4690-BDE1-E3A50181EF78}" type="slidenum">
+              <a:rPr lang="de-DE" smtClean="0"/>
+              <a:t>4</a:t>
+            </a:fld>
+            <a:endParaRPr lang="de-DE"/>
+          </a:p>
+        </p:txBody>
+      </p:sp>
+      <p:pic>
+        <p:nvPicPr>
+          <p:cNvPr id="9" name="Picture 8">
+            <a:extLst>
+              <a:ext uri="{FF2B5EF4-FFF2-40B4-BE49-F238E27FC236}">
+                <a16:creationId xmlns:a16="http://schemas.microsoft.com/office/drawing/2014/main" id="{165A1D36-1F38-8E15-FCA9-7B1D7AE65E18}"/>
+              </a:ext>
+            </a:extLst>
+          </p:cNvPr>
+          <p:cNvPicPr>
+            <a:picLocks noChangeAspect="1"/>
+          </p:cNvPicPr>
+          <p:nvPr/>
+        </p:nvPicPr>
+        <p:blipFill>
+          <a:blip r:embed="rId2">
+            <a:extLst>
+              <a:ext uri="{28A0092B-C50C-407E-A947-70E740481C1C}">
+                <a14:useLocalDpi xmlns:a14="http://schemas.microsoft.com/office/drawing/2010/main" val="0"/>
+              </a:ext>
+            </a:extLst>
+          </a:blip>
+          <a:stretch>
+            <a:fillRect/>
+          </a:stretch>
+        </p:blipFill>
+        <p:spPr>
+          <a:xfrm>
+            <a:off x="1622089" y="2623930"/>
+            <a:ext cx="2622642" cy="1966982"/>
+          </a:xfrm>
+          <a:prstGeom prst="rect">
+            <a:avLst/>
+          </a:prstGeom>
+        </p:spPr>
+      </p:pic>
+      <p:pic>
+        <p:nvPicPr>
+          <p:cNvPr id="11" name="Picture 10">
+            <a:extLst>
+              <a:ext uri="{FF2B5EF4-FFF2-40B4-BE49-F238E27FC236}">
+                <a16:creationId xmlns:a16="http://schemas.microsoft.com/office/drawing/2014/main" id="{D184A8E8-97B1-269E-280A-22B1FFC4C4FB}"/>
+              </a:ext>
+            </a:extLst>
+          </p:cNvPr>
+          <p:cNvPicPr>
+            <a:picLocks noChangeAspect="1"/>
+          </p:cNvPicPr>
+          <p:nvPr/>
+        </p:nvPicPr>
+        <p:blipFill>
+          <a:blip r:embed="rId3">
+            <a:extLst>
+              <a:ext uri="{28A0092B-C50C-407E-A947-70E740481C1C}">
+                <a14:useLocalDpi xmlns:a14="http://schemas.microsoft.com/office/drawing/2010/main" val="0"/>
+              </a:ext>
+            </a:extLst>
+          </a:blip>
+          <a:stretch>
+            <a:fillRect/>
+          </a:stretch>
+        </p:blipFill>
+        <p:spPr>
+          <a:xfrm>
+            <a:off x="7369832" y="2601843"/>
+            <a:ext cx="2622642" cy="1966982"/>
+          </a:xfrm>
+          <a:prstGeom prst="rect">
+            <a:avLst/>
+          </a:prstGeom>
+        </p:spPr>
+      </p:pic>
+      <p:pic>
+        <p:nvPicPr>
+          <p:cNvPr id="13" name="Picture 12">
+            <a:extLst>
+              <a:ext uri="{FF2B5EF4-FFF2-40B4-BE49-F238E27FC236}">
+                <a16:creationId xmlns:a16="http://schemas.microsoft.com/office/drawing/2014/main" id="{F7F3127C-577E-F1EB-FCB8-C9BE42EEC2B7}"/>
+              </a:ext>
+            </a:extLst>
+          </p:cNvPr>
+          <p:cNvPicPr>
+            <a:picLocks noChangeAspect="1"/>
+          </p:cNvPicPr>
+          <p:nvPr/>
+        </p:nvPicPr>
+        <p:blipFill>
+          <a:blip r:embed="rId4">
+            <a:extLst>
+              <a:ext uri="{28A0092B-C50C-407E-A947-70E740481C1C}">
+                <a14:useLocalDpi xmlns:a14="http://schemas.microsoft.com/office/drawing/2010/main" val="0"/>
+              </a:ext>
+            </a:extLst>
+          </a:blip>
+          <a:stretch>
+            <a:fillRect/>
+          </a:stretch>
+        </p:blipFill>
+        <p:spPr>
+          <a:xfrm>
+            <a:off x="4351687" y="4179680"/>
+            <a:ext cx="2902227" cy="2176670"/>
+          </a:xfrm>
+          <a:prstGeom prst="rect">
+            <a:avLst/>
+          </a:prstGeom>
+        </p:spPr>
+      </p:pic>
+      <p:pic>
+        <p:nvPicPr>
+          <p:cNvPr id="15" name="Picture 14">
+            <a:extLst>
+              <a:ext uri="{FF2B5EF4-FFF2-40B4-BE49-F238E27FC236}">
+                <a16:creationId xmlns:a16="http://schemas.microsoft.com/office/drawing/2014/main" id="{7B1FC6B5-7D58-FB0E-CB3D-F93CA84FE738}"/>
+              </a:ext>
+            </a:extLst>
+          </p:cNvPr>
+          <p:cNvPicPr>
+            <a:picLocks noChangeAspect="1"/>
+          </p:cNvPicPr>
+          <p:nvPr/>
+        </p:nvPicPr>
+        <p:blipFill>
+          <a:blip r:embed="rId5">
+            <a:extLst>
+              <a:ext uri="{28A0092B-C50C-407E-A947-70E740481C1C}">
+                <a14:useLocalDpi xmlns:a14="http://schemas.microsoft.com/office/drawing/2010/main" val="0"/>
+              </a:ext>
+            </a:extLst>
+          </a:blip>
+          <a:stretch>
+            <a:fillRect/>
+          </a:stretch>
+        </p:blipFill>
+        <p:spPr>
+          <a:xfrm>
+            <a:off x="4038600" y="259714"/>
+            <a:ext cx="1773162" cy="2364216"/>
+          </a:xfrm>
+          <a:prstGeom prst="rect">
+            <a:avLst/>
+          </a:prstGeom>
+        </p:spPr>
+      </p:pic>
+      <p:pic>
+        <p:nvPicPr>
+          <p:cNvPr id="17" name="Picture 16">
+            <a:extLst>
+              <a:ext uri="{FF2B5EF4-FFF2-40B4-BE49-F238E27FC236}">
+                <a16:creationId xmlns:a16="http://schemas.microsoft.com/office/drawing/2014/main" id="{B2CE068F-147B-495B-36E0-D5CDCFC3E851}"/>
+              </a:ext>
+            </a:extLst>
+          </p:cNvPr>
+          <p:cNvPicPr>
+            <a:picLocks noChangeAspect="1"/>
+          </p:cNvPicPr>
+          <p:nvPr/>
+        </p:nvPicPr>
+        <p:blipFill>
+          <a:blip r:embed="rId6">
+            <a:extLst>
+              <a:ext uri="{28A0092B-C50C-407E-A947-70E740481C1C}">
+                <a14:useLocalDpi xmlns:a14="http://schemas.microsoft.com/office/drawing/2010/main" val="0"/>
+              </a:ext>
+            </a:extLst>
+          </a:blip>
+          <a:stretch>
+            <a:fillRect/>
+          </a:stretch>
+        </p:blipFill>
+        <p:spPr>
+          <a:xfrm>
+            <a:off x="5811762" y="259714"/>
+            <a:ext cx="1773162" cy="2364216"/>
+          </a:xfrm>
+          <a:prstGeom prst="rect">
+            <a:avLst/>
+          </a:prstGeom>
+        </p:spPr>
+      </p:pic>
+      <p:sp>
+        <p:nvSpPr>
+          <p:cNvPr id="18" name="TextBox 17">
+            <a:extLst>
+              <a:ext uri="{FF2B5EF4-FFF2-40B4-BE49-F238E27FC236}">
+                <a16:creationId xmlns:a16="http://schemas.microsoft.com/office/drawing/2014/main" id="{9BDB83D4-5222-CFFD-29FE-F43E93F15C58}"/>
+              </a:ext>
+            </a:extLst>
+          </p:cNvPr>
+          <p:cNvSpPr txBox="1"/>
+          <p:nvPr/>
+        </p:nvSpPr>
+        <p:spPr>
+          <a:xfrm>
+            <a:off x="2878202" y="1371879"/>
+            <a:ext cx="1052019" cy="369332"/>
+          </a:xfrm>
+          <a:prstGeom prst="rect">
+            <a:avLst/>
+          </a:prstGeom>
+          <a:noFill/>
+        </p:spPr>
+        <p:txBody>
+          <a:bodyPr wrap="none" rtlCol="0">
+            <a:spAutoFit/>
+          </a:bodyPr>
+          <a:lstStyle/>
+          <a:p>
+            <a:r>
+              <a:rPr lang="en-IN" dirty="0"/>
+              <a:t>Front left</a:t>
+            </a:r>
+          </a:p>
+        </p:txBody>
+      </p:sp>
+      <p:sp>
+        <p:nvSpPr>
+          <p:cNvPr id="19" name="TextBox 18">
+            <a:extLst>
+              <a:ext uri="{FF2B5EF4-FFF2-40B4-BE49-F238E27FC236}">
+                <a16:creationId xmlns:a16="http://schemas.microsoft.com/office/drawing/2014/main" id="{88B708D6-3835-FC69-FBC1-DBD834064EBC}"/>
+              </a:ext>
+            </a:extLst>
+          </p:cNvPr>
+          <p:cNvSpPr txBox="1"/>
+          <p:nvPr/>
+        </p:nvSpPr>
+        <p:spPr>
+          <a:xfrm>
+            <a:off x="7639778" y="1246113"/>
+            <a:ext cx="1176989" cy="369332"/>
+          </a:xfrm>
+          <a:prstGeom prst="rect">
+            <a:avLst/>
+          </a:prstGeom>
+          <a:noFill/>
+        </p:spPr>
+        <p:txBody>
+          <a:bodyPr wrap="none" rtlCol="0">
+            <a:spAutoFit/>
+          </a:bodyPr>
+          <a:lstStyle/>
+          <a:p>
+            <a:r>
+              <a:rPr lang="en-IN" dirty="0"/>
+              <a:t>Front right</a:t>
+            </a:r>
+          </a:p>
+        </p:txBody>
+      </p:sp>
+      <p:sp>
+        <p:nvSpPr>
+          <p:cNvPr id="20" name="TextBox 19">
+            <a:extLst>
+              <a:ext uri="{FF2B5EF4-FFF2-40B4-BE49-F238E27FC236}">
+                <a16:creationId xmlns:a16="http://schemas.microsoft.com/office/drawing/2014/main" id="{9C394915-D9D0-6828-9AD4-4F0DF2B6945A}"/>
+              </a:ext>
+            </a:extLst>
+          </p:cNvPr>
+          <p:cNvSpPr txBox="1"/>
+          <p:nvPr/>
+        </p:nvSpPr>
+        <p:spPr>
+          <a:xfrm>
+            <a:off x="10108392" y="3397070"/>
+            <a:ext cx="668260" cy="369332"/>
+          </a:xfrm>
+          <a:prstGeom prst="rect">
+            <a:avLst/>
+          </a:prstGeom>
+          <a:noFill/>
+        </p:spPr>
+        <p:txBody>
+          <a:bodyPr wrap="none" rtlCol="0">
+            <a:spAutoFit/>
+          </a:bodyPr>
+          <a:lstStyle/>
+          <a:p>
+            <a:r>
+              <a:rPr lang="en-IN" dirty="0"/>
+              <a:t>Right</a:t>
+            </a:r>
+          </a:p>
+        </p:txBody>
+      </p:sp>
+      <p:sp>
+        <p:nvSpPr>
+          <p:cNvPr id="21" name="TextBox 20">
+            <a:extLst>
+              <a:ext uri="{FF2B5EF4-FFF2-40B4-BE49-F238E27FC236}">
+                <a16:creationId xmlns:a16="http://schemas.microsoft.com/office/drawing/2014/main" id="{2754A696-12B0-7F53-23D9-5506CD34362E}"/>
+              </a:ext>
+            </a:extLst>
+          </p:cNvPr>
+          <p:cNvSpPr txBox="1"/>
+          <p:nvPr/>
+        </p:nvSpPr>
+        <p:spPr>
+          <a:xfrm>
+            <a:off x="570070" y="3422755"/>
+            <a:ext cx="543290" cy="369332"/>
+          </a:xfrm>
+          <a:prstGeom prst="rect">
+            <a:avLst/>
+          </a:prstGeom>
+          <a:noFill/>
+        </p:spPr>
+        <p:txBody>
+          <a:bodyPr wrap="none" rtlCol="0">
+            <a:spAutoFit/>
+          </a:bodyPr>
+          <a:lstStyle/>
+          <a:p>
+            <a:r>
+              <a:rPr lang="en-IN" dirty="0"/>
+              <a:t>Left</a:t>
+            </a:r>
+          </a:p>
+        </p:txBody>
+      </p:sp>
+      <p:sp>
+        <p:nvSpPr>
+          <p:cNvPr id="22" name="TextBox 21">
+            <a:extLst>
+              <a:ext uri="{FF2B5EF4-FFF2-40B4-BE49-F238E27FC236}">
+                <a16:creationId xmlns:a16="http://schemas.microsoft.com/office/drawing/2014/main" id="{AE1E66A6-FD1D-F3EF-525A-7E14D6E00714}"/>
+              </a:ext>
+            </a:extLst>
+          </p:cNvPr>
+          <p:cNvSpPr txBox="1"/>
+          <p:nvPr/>
+        </p:nvSpPr>
+        <p:spPr>
+          <a:xfrm>
+            <a:off x="5500619" y="3810348"/>
+            <a:ext cx="622286" cy="369332"/>
+          </a:xfrm>
+          <a:prstGeom prst="rect">
+            <a:avLst/>
+          </a:prstGeom>
+          <a:noFill/>
+        </p:spPr>
+        <p:txBody>
+          <a:bodyPr wrap="none" rtlCol="0">
+            <a:spAutoFit/>
+          </a:bodyPr>
+          <a:lstStyle/>
+          <a:p>
+            <a:r>
+              <a:rPr lang="en-IN" dirty="0"/>
+              <a:t>Back</a:t>
+            </a:r>
+          </a:p>
+        </p:txBody>
+      </p:sp>
+    </p:spTree>
+    <p:extLst>
+      <p:ext uri="{BB962C8B-B14F-4D97-AF65-F5344CB8AC3E}">
+        <p14:creationId xmlns:p14="http://schemas.microsoft.com/office/powerpoint/2010/main" val="1948677618"/>
+      </p:ext>
+    </p:extLst>
+  </p:cSld>
+  <p:clrMapOvr>
+    <a:masterClrMapping/>
+  </p:clrMapOvr>
+</p:sld>
+</file>
+
+<file path=ppt/slides/slide5.xml><?xml version="1.0" encoding="utf-8"?>
 <p:sld xmlns:a="http://schemas.openxmlformats.org/drawingml/2006/main" xmlns:r="http://schemas.openxmlformats.org/officeDocument/2006/relationships" xmlns:p="http://schemas.openxmlformats.org/presentationml/2006/main">
   <p:cSld>
     <p:spTree>
@@ -9388,7 +10393,7 @@
           <a:p>
             <a:fld id="{516988D0-1470-4690-BDE1-E3A50181EF78}" type="slidenum">
               <a:rPr lang="de-DE" smtClean="0"/>
-              <a:t>3</a:t>
+              <a:t>5</a:t>
             </a:fld>
             <a:endParaRPr lang="de-DE"/>
           </a:p>
@@ -9448,7 +10453,7 @@
 </p:sld>
 </file>
 
-<file path=ppt/slides/slide4.xml><?xml version="1.0" encoding="utf-8"?>
+<file path=ppt/slides/slide6.xml><?xml version="1.0" encoding="utf-8"?>
 <p:sld xmlns:a="http://schemas.openxmlformats.org/drawingml/2006/main" xmlns:r="http://schemas.openxmlformats.org/officeDocument/2006/relationships" xmlns:p="http://schemas.openxmlformats.org/presentationml/2006/main">
   <p:cSld>
     <p:spTree>
@@ -9621,7 +10626,7 @@
           <a:p>
             <a:fld id="{516988D0-1470-4690-BDE1-E3A50181EF78}" type="slidenum">
               <a:rPr lang="de-DE" smtClean="0"/>
-              <a:t>4</a:t>
+              <a:t>6</a:t>
             </a:fld>
             <a:endParaRPr lang="de-DE"/>
           </a:p>

--- a/documentation/presentations/SPOT presentation 04.pptx
+++ b/documentation/presentations/SPOT presentation 04.pptx
@@ -9074,32 +9074,11 @@
           <a:lstStyle/>
           <a:p>
             <a:r>
-              <a:rPr lang="de-DE" sz="4000" dirty="0">
+              <a:rPr lang="en-IN" sz="4000">
                 <a:latin typeface="Times New Roman" panose="02020603050405020304" pitchFamily="18" charset="0"/>
                 <a:cs typeface="Times New Roman" panose="02020603050405020304" pitchFamily="18" charset="0"/>
               </a:rPr>
-              <a:t>Understanding </a:t>
-            </a:r>
-            <a:r>
-              <a:rPr lang="en-IN" sz="4000" dirty="0">
-                <a:latin typeface="Times New Roman" panose="02020603050405020304" pitchFamily="18" charset="0"/>
-                <a:cs typeface="Times New Roman" panose="02020603050405020304" pitchFamily="18" charset="0"/>
-              </a:rPr>
-              <a:t>of</a:t>
-            </a:r>
-            <a:r>
-              <a:rPr lang="de-DE" sz="4000" dirty="0">
-                <a:latin typeface="Times New Roman" panose="02020603050405020304" pitchFamily="18" charset="0"/>
-                <a:cs typeface="Times New Roman" panose="02020603050405020304" pitchFamily="18" charset="0"/>
-              </a:rPr>
-              <a:t> SPOT </a:t>
-            </a:r>
-            <a:r>
-              <a:rPr lang="en-IN" sz="4000" dirty="0">
-                <a:latin typeface="Times New Roman" panose="02020603050405020304" pitchFamily="18" charset="0"/>
-                <a:cs typeface="Times New Roman" panose="02020603050405020304" pitchFamily="18" charset="0"/>
-              </a:rPr>
-              <a:t>communication</a:t>
+              <a:t>Working with SPOT</a:t>
             </a:r>
             <a:endParaRPr lang="de-DE" sz="4000" dirty="0">
               <a:latin typeface="Times New Roman" panose="02020603050405020304" pitchFamily="18" charset="0"/>
